--- a/代码/figures/论文数据图/问题一/第一问_技术路线图_逻辑重排_文字版.pptx
+++ b/代码/figures/论文数据图/问题一/第一问_技术路线图_逻辑重排_文字版.pptx
@@ -2,13 +2,13 @@
 <file path=ppt/presentation.xml><?xml version="1.0" encoding="utf-8"?>
 <p:presentation xmlns:p="http://schemas.openxmlformats.org/presentationml/2006/main">
   <p:sldMasterIdLst>
-    <p:sldMasterId xmlns:r="http://schemas.openxmlformats.org/officeDocument/2006/relationships" id="2147483648" r:id="R9dd1ecd08f484bd3"/>
+    <p:sldMasterId xmlns:r="http://schemas.openxmlformats.org/officeDocument/2006/relationships" id="2147483648" r:id="Rbb824fdfa18c43b8"/>
   </p:sldMasterIdLst>
   <p:notesMasterIdLst>
-    <p:notesMasterId xmlns:r="http://schemas.openxmlformats.org/officeDocument/2006/relationships" r:id="Rf931f80d92234ef0"/>
+    <p:notesMasterId xmlns:r="http://schemas.openxmlformats.org/officeDocument/2006/relationships" r:id="R46a9eac589d84b16"/>
   </p:notesMasterIdLst>
   <p:sldIdLst>
-    <p:sldId xmlns:r="http://schemas.openxmlformats.org/officeDocument/2006/relationships" id="256" r:id="Rd47af968f1704a6b"/>
+    <p:sldId xmlns:r="http://schemas.openxmlformats.org/officeDocument/2006/relationships" id="256" r:id="Rd01b2a8f4b9c4ad4"/>
   </p:sldIdLst>
   <p:sldSz cx="15240000" cy="6858000"/>
   <p:notesSz cx="6858000" cy="9144000"/>
@@ -442,7 +442,7 @@
           <a:lstStyle xmlns:a="http://schemas.openxmlformats.org/drawingml/2006/main"/>
           <a:p xmlns:a="http://schemas.openxmlformats.org/drawingml/2006/main">
             <a:r>
-              <a:t>来源：代码/q1_solution.py；建模思路/题目分析报告.md；代码/results/q1/第一问结果审核.md。144个10分钟时段，145个SOC状态。g,c,d,w为非负电量变量，z为二元变量，弃光满足w_t≤V_tΔt。图中N_t定义为净负荷能量。充放电互斥分别用c_t≤(5000/6)z_t和d_t≤(5000/6)(1−z_t)约束。E0=E144，共同值优化；不固定为6000。MILP和LP松弛分别求解，无储能基线独立计算。图中约束是同时成立的条件，没有先后求解关系。公式为原生OMML，中文SimSun，公式Cambria Math。</a:t>
+              <a:t/>
             </a:r>
           </a:p>
         </p:txBody>
@@ -510,7 +510,7 @@
   </p:cSld>
   <p:clrMap bg1="lt1" tx1="dk1" bg2="lt2" tx2="dk2" accent1="accent1" accent2="accent2" accent3="accent3" accent4="accent4" accent5="accent5" accent6="accent6" hlink="hlink" folHlink="folHlink"/>
   <p:sldLayoutIdLst>
-    <p:sldLayoutId xmlns:r="http://schemas.openxmlformats.org/officeDocument/2006/relationships" id="2147483649" r:id="Rc0be4141e6d64671"/>
+    <p:sldLayoutId xmlns:r="http://schemas.openxmlformats.org/officeDocument/2006/relationships" id="2147483649" r:id="R85537e0f98e345a8"/>
   </p:sldLayoutIdLst>
   <p:txStyles>
     <p:titleStyle>
@@ -1038,7 +1038,7 @@
 </file>
 
 <file path=ppt/slides/slide1.xml><?xml version="1.0" encoding="utf-8"?>
-<p:sld xmlns:p="http://schemas.openxmlformats.org/presentationml/2006/main" xmlns:mc="http://schemas.openxmlformats.org/markup-compatibility/2006" xmlns:a14="http://schemas.microsoft.com/office/drawing/2010/main" mc:Ignorable="a14">
+<p:sld xmlns:p="http://schemas.openxmlformats.org/presentationml/2006/main">
   <p:cSld>
     <p:bg>
       <p:bgPr>
@@ -1121,6 +1121,7 @@
           <a:lstStyle xmlns:a="http://schemas.openxmlformats.org/drawingml/2006/main"/>
           <a:p xmlns:a="http://schemas.openxmlformats.org/drawingml/2006/main">
             <a:pPr algn="ctr">
+              <a:buNone/>
               <a:defRPr sz="2100" b="1">
                 <a:solidFill>
                   <a:srgbClr val="367CB3"/>
@@ -1178,6 +1179,7 @@
           <a:lstStyle xmlns:a="http://schemas.openxmlformats.org/drawingml/2006/main"/>
           <a:p xmlns:a="http://schemas.openxmlformats.org/drawingml/2006/main">
             <a:pPr algn="ctr">
+              <a:buNone/>
               <a:defRPr sz="1950" b="1">
                 <a:solidFill>
                   <a:srgbClr val="367CB3"/>
@@ -1241,6 +1243,7 @@
           <a:lstStyle xmlns:a="http://schemas.openxmlformats.org/drawingml/2006/main"/>
           <a:p xmlns:a="http://schemas.openxmlformats.org/drawingml/2006/main">
             <a:pPr algn="ctr">
+              <a:buNone/>
               <a:defRPr sz="1800" b="1">
                 <a:solidFill>
                   <a:srgbClr val="111111"/>
@@ -1264,6 +1267,7 @@
           </a:p>
           <a:p xmlns:a="http://schemas.openxmlformats.org/drawingml/2006/main">
             <a:pPr algn="ctr">
+              <a:buNone/>
               <a:defRPr sz="1800" b="1">
                 <a:solidFill>
                   <a:srgbClr val="111111"/>
@@ -1287,128 +1291,66 @@
           </a:p>
         </p:txBody>
       </p:sp>
-      <mc:AlternateContent xmlns:mc="http://schemas.openxmlformats.org/markup-compatibility/2006">
-        <mc:Choice xmlns:a14="http://schemas.microsoft.com/office/drawing/2010/main" Requires="a14">
-          <p:sp>
-            <p:nvSpPr>
-              <p:cNvPr id="5" name="eq-input">
-                <a:extLst xmlns:a="http://schemas.openxmlformats.org/drawingml/2006/main">
-                  <a:ext uri="{FF2B5EF4-FFF2-40B4-BE49-F238E27FC236}">
-                    <a16:creationId xmlns:a16="http://schemas.microsoft.com/office/drawing/2014/main" id="{BA1B037D-2457-4ACF-940C-F08F4A914C05}"/>
-                  </a:ext>
-                </a:extLst>
-              </p:cNvPr>
-              <p:cNvSpPr>
-                <a:spLocks xmlns:a="http://schemas.openxmlformats.org/drawingml/2006/main" noGrp="1"/>
-              </p:cNvSpPr>
-              <p:nvPr/>
-            </p:nvSpPr>
-            <p:spPr>
-              <a:xfrm xmlns:a="http://schemas.openxmlformats.org/drawingml/2006/main">
-                <a:off x="457200" y="2343150"/>
-                <a:ext cx="2038350" cy="342900"/>
-              </a:xfrm>
-              <a:prstGeom xmlns:a="http://schemas.openxmlformats.org/drawingml/2006/main" prst="rect">
-                <a:avLst/>
-              </a:prstGeom>
-              <a:solidFill xmlns:a="http://schemas.openxmlformats.org/drawingml/2006/main">
-                <a:srgbClr val="FFFFFF"/>
-              </a:solidFill>
-              <a:ln xmlns:a="http://schemas.openxmlformats.org/drawingml/2006/main" w="0">
-                <a:noFill/>
-              </a:ln>
-            </p:spPr>
-            <p:txBody xmlns:a="http://schemas.openxmlformats.org/drawingml/2006/main">
-              <a:bodyPr xmlns:a="http://schemas.openxmlformats.org/drawingml/2006/main" wrap="none" anchor="ctr" lIns="0" tIns="0" rIns="0" bIns="0">
-                <a:noAutofit/>
-              </a:bodyPr>
-              <a:lstStyle xmlns:a="http://schemas.openxmlformats.org/drawingml/2006/main"/>
-              <a:p>
-                <a:pPr algn="ctr">
-                  <a:defRPr sz="1950">
-                    <a:solidFill>
-                      <a:srgbClr val="111111"/>
-                    </a:solidFill>
-                    <a:latin typeface="SimSun"/>
-                    <a:ea typeface="SimSun"/>
-                    <a:cs typeface="SimSun"/>
-                  </a:defRPr>
-                </a:pPr>
-                <a:r>
-                  <a:rPr sz="1950">
-                    <a:solidFill>
-                      <a:srgbClr val="111111"/>
-                    </a:solidFill>
-                    <a:latin typeface="SimSun"/>
-                    <a:ea typeface="SimSun"/>
-                    <a:cs typeface="SimSun"/>
-                  </a:rPr>
-                  <a:t>已知电价与供需预测</a:t>
-                </a:r>
-              </a:p>
-            </p:txBody>
-          </p:sp>
-        </mc:Choice>
-        <mc:Fallback>
-          <p:sp>
-            <p:nvSpPr>
-              <p:cNvPr id="5" name="eq-input">
-                <a:extLst xmlns:a="http://schemas.openxmlformats.org/drawingml/2006/main">
-                  <a:ext uri="{FF2B5EF4-FFF2-40B4-BE49-F238E27FC236}">
-                    <a16:creationId xmlns:a16="http://schemas.microsoft.com/office/drawing/2014/main" id="{BA1B037D-2457-4ACF-940C-F08F4A914C05}"/>
-                  </a:ext>
-                </a:extLst>
-              </p:cNvPr>
-              <p:cNvSpPr>
-                <a:spLocks xmlns:a="http://schemas.openxmlformats.org/drawingml/2006/main" noGrp="1"/>
-              </p:cNvSpPr>
-              <p:nvPr/>
-            </p:nvSpPr>
-            <p:spPr>
-              <a:xfrm xmlns:a="http://schemas.openxmlformats.org/drawingml/2006/main">
-                <a:off x="457200" y="2343150"/>
-                <a:ext cx="2038350" cy="342900"/>
-              </a:xfrm>
-              <a:prstGeom xmlns:a="http://schemas.openxmlformats.org/drawingml/2006/main" prst="rect">
-                <a:avLst/>
-              </a:prstGeom>
-              <a:solidFill xmlns:a="http://schemas.openxmlformats.org/drawingml/2006/main">
-                <a:srgbClr val="FFFFFF"/>
-              </a:solidFill>
-              <a:ln xmlns:a="http://schemas.openxmlformats.org/drawingml/2006/main" w="0">
-                <a:noFill/>
-              </a:ln>
-            </p:spPr>
-            <p:txBody xmlns:a="http://schemas.openxmlformats.org/drawingml/2006/main">
-              <a:bodyPr xmlns:a="http://schemas.openxmlformats.org/drawingml/2006/main" wrap="none" anchor="ctr" lIns="0" tIns="0" rIns="0" bIns="0">
-                <a:noAutofit/>
-              </a:bodyPr>
-              <a:lstStyle xmlns:a="http://schemas.openxmlformats.org/drawingml/2006/main"/>
-              <a:p>
-                <a:pPr algn="ctr">
-                  <a:defRPr sz="1950">
-                    <a:solidFill>
-                      <a:srgbClr val="111111"/>
-                    </a:solidFill>
-                    <a:latin typeface="SimSun"/>
-                    <a:ea typeface="SimSun"/>
-                    <a:cs typeface="SimSun"/>
-                  </a:defRPr>
-                </a:pPr>
-                <a:r>
-                  <a:rPr sz="1950">
-                    <a:solidFill>
-                      <a:srgbClr val="111111"/>
-                    </a:solidFill>
-                    <a:latin typeface="SimSun"/>
-                  </a:rPr>
-                  <a:t>已知电价与供需预测</a:t>
-                </a:r>
-              </a:p>
-            </p:txBody>
-          </p:sp>
-        </mc:Fallback>
-      </mc:AlternateContent>
+      <p:sp>
+        <p:nvSpPr>
+          <p:cNvPr id="5" name="eq-input">
+            <a:extLst xmlns:a="http://schemas.openxmlformats.org/drawingml/2006/main">
+              <a:ext uri="{FF2B5EF4-FFF2-40B4-BE49-F238E27FC236}">
+                <a16:creationId xmlns:a16="http://schemas.microsoft.com/office/drawing/2014/main" id="{BA1B037D-2457-4ACF-940C-F08F4A914C05}"/>
+              </a:ext>
+            </a:extLst>
+          </p:cNvPr>
+          <p:cNvSpPr>
+            <a:spLocks xmlns:a="http://schemas.openxmlformats.org/drawingml/2006/main" noGrp="1"/>
+          </p:cNvSpPr>
+          <p:nvPr/>
+        </p:nvSpPr>
+        <p:spPr>
+          <a:xfrm xmlns:a="http://schemas.openxmlformats.org/drawingml/2006/main">
+            <a:off x="457200" y="2343150"/>
+            <a:ext cx="2038350" cy="342900"/>
+          </a:xfrm>
+          <a:prstGeom xmlns:a="http://schemas.openxmlformats.org/drawingml/2006/main" prst="rect">
+            <a:avLst/>
+          </a:prstGeom>
+          <a:solidFill xmlns:a="http://schemas.openxmlformats.org/drawingml/2006/main">
+            <a:srgbClr val="FFFFFF"/>
+          </a:solidFill>
+          <a:ln xmlns:a="http://schemas.openxmlformats.org/drawingml/2006/main" w="0">
+            <a:noFill/>
+          </a:ln>
+        </p:spPr>
+        <p:txBody>
+          <a:bodyPr xmlns:a="http://schemas.openxmlformats.org/drawingml/2006/main" wrap="none" lIns="0" tIns="0" rIns="0" bIns="0" anchor="ctr">
+            <a:noAutofit/>
+          </a:bodyPr>
+          <a:lstStyle xmlns:a="http://schemas.openxmlformats.org/drawingml/2006/main"/>
+          <a:p xmlns:a="http://schemas.openxmlformats.org/drawingml/2006/main">
+            <a:pPr algn="ctr">
+              <a:buNone/>
+              <a:defRPr sz="1950">
+                <a:solidFill>
+                  <a:srgbClr val="111111"/>
+                </a:solidFill>
+                <a:latin typeface="SimSun"/>
+                <a:ea typeface="SimSun"/>
+                <a:cs typeface="SimSun"/>
+              </a:defRPr>
+            </a:pPr>
+            <a:r>
+              <a:rPr sz="1950">
+                <a:solidFill>
+                  <a:srgbClr val="111111"/>
+                </a:solidFill>
+                <a:latin typeface="SimSun"/>
+                <a:ea typeface="SimSun"/>
+                <a:cs typeface="SimSun"/>
+              </a:rPr>
+              <a:t>已知电价与供需预测</a:t>
+            </a:r>
+          </a:p>
+        </p:txBody>
+      </p:sp>
       <p:sp>
         <p:nvSpPr>
           <p:cNvPr id="6" name="eq-time-frame">
@@ -1486,6 +1428,7 @@
           <a:lstStyle xmlns:a="http://schemas.openxmlformats.org/drawingml/2006/main"/>
           <a:p xmlns:a="http://schemas.openxmlformats.org/drawingml/2006/main">
             <a:pPr algn="ctr">
+              <a:buNone/>
               <a:defRPr sz="1575" b="1">
                 <a:solidFill>
                   <a:srgbClr val="367CB3"/>
@@ -1509,124 +1452,64 @@
           </a:p>
         </p:txBody>
       </p:sp>
-      <mc:AlternateContent xmlns:mc="http://schemas.openxmlformats.org/markup-compatibility/2006">
-        <mc:Choice xmlns:a14="http://schemas.microsoft.com/office/drawing/2010/main" Requires="a14">
-          <p:sp>
-            <p:nvSpPr>
-              <p:cNvPr id="8" name="eq-time">
-                <a:extLst xmlns:a="http://schemas.openxmlformats.org/drawingml/2006/main">
-                  <a:ext uri="{FF2B5EF4-FFF2-40B4-BE49-F238E27FC236}">
-                    <a16:creationId xmlns:a16="http://schemas.microsoft.com/office/drawing/2014/main" id="{1BDA45BA-8A3B-4A69-8E36-77D7BFC5F954}"/>
-                  </a:ext>
-                </a:extLst>
-              </p:cNvPr>
-              <p:cNvSpPr>
-                <a:spLocks xmlns:a="http://schemas.openxmlformats.org/drawingml/2006/main" noGrp="1"/>
-              </p:cNvSpPr>
-              <p:nvPr/>
-            </p:nvSpPr>
-            <p:spPr>
-              <a:xfrm xmlns:a="http://schemas.openxmlformats.org/drawingml/2006/main">
-                <a:off x="428625" y="3257550"/>
-                <a:ext cx="2095500" cy="542925"/>
-              </a:xfrm>
-              <a:prstGeom xmlns:a="http://schemas.openxmlformats.org/drawingml/2006/main" prst="rect">
-                <a:avLst/>
-              </a:prstGeom>
-              <a:noFill xmlns:a="http://schemas.openxmlformats.org/drawingml/2006/main"/>
-              <a:ln xmlns:a="http://schemas.openxmlformats.org/drawingml/2006/main" w="0">
-                <a:noFill/>
-              </a:ln>
-            </p:spPr>
-            <p:txBody xmlns:a="http://schemas.openxmlformats.org/drawingml/2006/main">
-              <a:bodyPr xmlns:a="http://schemas.openxmlformats.org/drawingml/2006/main" wrap="none" anchor="ctr" lIns="0" tIns="0" rIns="0" bIns="0">
-                <a:noAutofit/>
-              </a:bodyPr>
-              <a:lstStyle xmlns:a="http://schemas.openxmlformats.org/drawingml/2006/main"/>
-              <a:p>
-                <a:pPr algn="ctr">
-                  <a:defRPr sz="1950">
-                    <a:solidFill>
-                      <a:srgbClr val="111111"/>
-                    </a:solidFill>
-                    <a:latin typeface="SimSun"/>
-                    <a:ea typeface="SimSun"/>
-                    <a:cs typeface="SimSun"/>
-                  </a:defRPr>
-                </a:pPr>
-                <a:r>
-                  <a:rPr sz="1950">
-                    <a:solidFill>
-                      <a:srgbClr val="111111"/>
-                    </a:solidFill>
-                    <a:latin typeface="SimSun"/>
-                    <a:ea typeface="SimSun"/>
-                    <a:cs typeface="SimSun"/>
-                  </a:rPr>
-                  <a:t>全天等间隔划分</a:t>
-                </a:r>
-              </a:p>
-            </p:txBody>
-          </p:sp>
-        </mc:Choice>
-        <mc:Fallback>
-          <p:sp>
-            <p:nvSpPr>
-              <p:cNvPr id="8" name="eq-time">
-                <a:extLst xmlns:a="http://schemas.openxmlformats.org/drawingml/2006/main">
-                  <a:ext uri="{FF2B5EF4-FFF2-40B4-BE49-F238E27FC236}">
-                    <a16:creationId xmlns:a16="http://schemas.microsoft.com/office/drawing/2014/main" id="{1BDA45BA-8A3B-4A69-8E36-77D7BFC5F954}"/>
-                  </a:ext>
-                </a:extLst>
-              </p:cNvPr>
-              <p:cNvSpPr>
-                <a:spLocks xmlns:a="http://schemas.openxmlformats.org/drawingml/2006/main" noGrp="1"/>
-              </p:cNvSpPr>
-              <p:nvPr/>
-            </p:nvSpPr>
-            <p:spPr>
-              <a:xfrm xmlns:a="http://schemas.openxmlformats.org/drawingml/2006/main">
-                <a:off x="428625" y="3257550"/>
-                <a:ext cx="2095500" cy="542925"/>
-              </a:xfrm>
-              <a:prstGeom xmlns:a="http://schemas.openxmlformats.org/drawingml/2006/main" prst="rect">
-                <a:avLst/>
-              </a:prstGeom>
-              <a:noFill xmlns:a="http://schemas.openxmlformats.org/drawingml/2006/main"/>
-              <a:ln xmlns:a="http://schemas.openxmlformats.org/drawingml/2006/main" w="0">
-                <a:noFill/>
-              </a:ln>
-            </p:spPr>
-            <p:txBody xmlns:a="http://schemas.openxmlformats.org/drawingml/2006/main">
-              <a:bodyPr xmlns:a="http://schemas.openxmlformats.org/drawingml/2006/main" wrap="none" anchor="ctr" lIns="0" tIns="0" rIns="0" bIns="0">
-                <a:noAutofit/>
-              </a:bodyPr>
-              <a:lstStyle xmlns:a="http://schemas.openxmlformats.org/drawingml/2006/main"/>
-              <a:p>
-                <a:pPr algn="ctr">
-                  <a:defRPr sz="1950">
-                    <a:solidFill>
-                      <a:srgbClr val="111111"/>
-                    </a:solidFill>
-                    <a:latin typeface="SimSun"/>
-                    <a:ea typeface="SimSun"/>
-                    <a:cs typeface="SimSun"/>
-                  </a:defRPr>
-                </a:pPr>
-                <a:r>
-                  <a:rPr sz="1950">
-                    <a:solidFill>
-                      <a:srgbClr val="111111"/>
-                    </a:solidFill>
-                    <a:latin typeface="SimSun"/>
-                  </a:rPr>
-                  <a:t>全天等间隔划分</a:t>
-                </a:r>
-              </a:p>
-            </p:txBody>
-          </p:sp>
-        </mc:Fallback>
-      </mc:AlternateContent>
+      <p:sp>
+        <p:nvSpPr>
+          <p:cNvPr id="8" name="eq-time">
+            <a:extLst xmlns:a="http://schemas.openxmlformats.org/drawingml/2006/main">
+              <a:ext uri="{FF2B5EF4-FFF2-40B4-BE49-F238E27FC236}">
+                <a16:creationId xmlns:a16="http://schemas.microsoft.com/office/drawing/2014/main" id="{1BDA45BA-8A3B-4A69-8E36-77D7BFC5F954}"/>
+              </a:ext>
+            </a:extLst>
+          </p:cNvPr>
+          <p:cNvSpPr>
+            <a:spLocks xmlns:a="http://schemas.openxmlformats.org/drawingml/2006/main" noGrp="1"/>
+          </p:cNvSpPr>
+          <p:nvPr/>
+        </p:nvSpPr>
+        <p:spPr>
+          <a:xfrm xmlns:a="http://schemas.openxmlformats.org/drawingml/2006/main">
+            <a:off x="428625" y="3257550"/>
+            <a:ext cx="2095500" cy="542925"/>
+          </a:xfrm>
+          <a:prstGeom xmlns:a="http://schemas.openxmlformats.org/drawingml/2006/main" prst="rect">
+            <a:avLst/>
+          </a:prstGeom>
+          <a:noFill xmlns:a="http://schemas.openxmlformats.org/drawingml/2006/main"/>
+          <a:ln xmlns:a="http://schemas.openxmlformats.org/drawingml/2006/main" w="0">
+            <a:noFill/>
+          </a:ln>
+        </p:spPr>
+        <p:txBody>
+          <a:bodyPr xmlns:a="http://schemas.openxmlformats.org/drawingml/2006/main" wrap="none" lIns="0" tIns="0" rIns="0" bIns="0" anchor="ctr">
+            <a:noAutofit/>
+          </a:bodyPr>
+          <a:lstStyle xmlns:a="http://schemas.openxmlformats.org/drawingml/2006/main"/>
+          <a:p xmlns:a="http://schemas.openxmlformats.org/drawingml/2006/main">
+            <a:pPr algn="ctr">
+              <a:buNone/>
+              <a:defRPr sz="1950">
+                <a:solidFill>
+                  <a:srgbClr val="111111"/>
+                </a:solidFill>
+                <a:latin typeface="SimSun"/>
+                <a:ea typeface="SimSun"/>
+                <a:cs typeface="SimSun"/>
+              </a:defRPr>
+            </a:pPr>
+            <a:r>
+              <a:rPr sz="1950">
+                <a:solidFill>
+                  <a:srgbClr val="111111"/>
+                </a:solidFill>
+                <a:latin typeface="SimSun"/>
+                <a:ea typeface="SimSun"/>
+                <a:cs typeface="SimSun"/>
+              </a:rPr>
+              <a:t>全天等间隔划分</a:t>
+            </a:r>
+          </a:p>
+        </p:txBody>
+      </p:sp>
       <p:sp>
         <p:nvSpPr>
           <p:cNvPr id="9" name="eq-netload-frame">
@@ -1704,6 +1587,7 @@
           <a:lstStyle xmlns:a="http://schemas.openxmlformats.org/drawingml/2006/main"/>
           <a:p xmlns:a="http://schemas.openxmlformats.org/drawingml/2006/main">
             <a:pPr algn="ctr">
+              <a:buNone/>
               <a:defRPr sz="1575" b="1">
                 <a:solidFill>
                   <a:srgbClr val="367CB3"/>
@@ -1727,168 +1611,88 @@
           </a:p>
         </p:txBody>
       </p:sp>
-      <mc:AlternateContent xmlns:mc="http://schemas.openxmlformats.org/markup-compatibility/2006">
-        <mc:Choice xmlns:a14="http://schemas.microsoft.com/office/drawing/2010/main" Requires="a14">
-          <p:sp>
-            <p:nvSpPr>
-              <p:cNvPr id="11" name="eq-netload">
-                <a:extLst xmlns:a="http://schemas.openxmlformats.org/drawingml/2006/main">
-                  <a:ext uri="{FF2B5EF4-FFF2-40B4-BE49-F238E27FC236}">
-                    <a16:creationId xmlns:a16="http://schemas.microsoft.com/office/drawing/2014/main" id="{65C94E5D-94F6-4A19-B5CD-8D03277C4B22}"/>
-                  </a:ext>
-                </a:extLst>
-              </p:cNvPr>
-              <p:cNvSpPr>
-                <a:spLocks xmlns:a="http://schemas.openxmlformats.org/drawingml/2006/main" noGrp="1"/>
-              </p:cNvSpPr>
-              <p:nvPr/>
-            </p:nvSpPr>
-            <p:spPr>
-              <a:xfrm xmlns:a="http://schemas.openxmlformats.org/drawingml/2006/main">
-                <a:off x="428625" y="4391025"/>
-                <a:ext cx="2095500" cy="533400"/>
-              </a:xfrm>
-              <a:prstGeom xmlns:a="http://schemas.openxmlformats.org/drawingml/2006/main" prst="rect">
-                <a:avLst/>
-              </a:prstGeom>
-              <a:noFill xmlns:a="http://schemas.openxmlformats.org/drawingml/2006/main"/>
-              <a:ln xmlns:a="http://schemas.openxmlformats.org/drawingml/2006/main" w="0">
-                <a:noFill/>
-              </a:ln>
-            </p:spPr>
-            <p:txBody xmlns:a="http://schemas.openxmlformats.org/drawingml/2006/main">
-              <a:bodyPr xmlns:a="http://schemas.openxmlformats.org/drawingml/2006/main" wrap="none" anchor="ctr" lIns="0" tIns="0" rIns="0" bIns="0">
-                <a:noAutofit/>
-              </a:bodyPr>
-              <a:lstStyle xmlns:a="http://schemas.openxmlformats.org/drawingml/2006/main"/>
-              <a:p>
-                <a:pPr algn="ctr">
-                  <a:defRPr sz="1725">
-                    <a:solidFill>
-                      <a:srgbClr val="111111"/>
-                    </a:solidFill>
-                    <a:latin typeface="SimSun"/>
-                    <a:ea typeface="SimSun"/>
-                    <a:cs typeface="SimSun"/>
-                  </a:defRPr>
-                </a:pPr>
-                <a:r>
-                  <a:rPr sz="1725">
-                    <a:solidFill>
-                      <a:srgbClr val="111111"/>
-                    </a:solidFill>
-                    <a:latin typeface="SimSun"/>
-                    <a:ea typeface="SimSun"/>
-                    <a:cs typeface="SimSun"/>
-                  </a:rPr>
-                  <a:t>负荷扣除光伏</a:t>
-                </a:r>
-              </a:p>
-              <a:p>
-                <a:pPr algn="ctr">
-                  <a:defRPr sz="1725">
-                    <a:solidFill>
-                      <a:srgbClr val="111111"/>
-                    </a:solidFill>
-                    <a:latin typeface="SimSun"/>
-                    <a:ea typeface="SimSun"/>
-                    <a:cs typeface="SimSun"/>
-                  </a:defRPr>
-                </a:pPr>
-                <a:r>
-                  <a:rPr sz="1725">
-                    <a:solidFill>
-                      <a:srgbClr val="111111"/>
-                    </a:solidFill>
-                    <a:latin typeface="SimSun"/>
-                    <a:ea typeface="SimSun"/>
-                    <a:cs typeface="SimSun"/>
-                  </a:rPr>
-                  <a:t>按时段换算电量</a:t>
-                </a:r>
-              </a:p>
-            </p:txBody>
-          </p:sp>
-        </mc:Choice>
-        <mc:Fallback>
-          <p:sp>
-            <p:nvSpPr>
-              <p:cNvPr id="11" name="eq-netload">
-                <a:extLst xmlns:a="http://schemas.openxmlformats.org/drawingml/2006/main">
-                  <a:ext uri="{FF2B5EF4-FFF2-40B4-BE49-F238E27FC236}">
-                    <a16:creationId xmlns:a16="http://schemas.microsoft.com/office/drawing/2014/main" id="{65C94E5D-94F6-4A19-B5CD-8D03277C4B22}"/>
-                  </a:ext>
-                </a:extLst>
-              </p:cNvPr>
-              <p:cNvSpPr>
-                <a:spLocks xmlns:a="http://schemas.openxmlformats.org/drawingml/2006/main" noGrp="1"/>
-              </p:cNvSpPr>
-              <p:nvPr/>
-            </p:nvSpPr>
-            <p:spPr>
-              <a:xfrm xmlns:a="http://schemas.openxmlformats.org/drawingml/2006/main">
-                <a:off x="428625" y="4391025"/>
-                <a:ext cx="2095500" cy="533400"/>
-              </a:xfrm>
-              <a:prstGeom xmlns:a="http://schemas.openxmlformats.org/drawingml/2006/main" prst="rect">
-                <a:avLst/>
-              </a:prstGeom>
-              <a:noFill xmlns:a="http://schemas.openxmlformats.org/drawingml/2006/main"/>
-              <a:ln xmlns:a="http://schemas.openxmlformats.org/drawingml/2006/main" w="0">
-                <a:noFill/>
-              </a:ln>
-            </p:spPr>
-            <p:txBody xmlns:a="http://schemas.openxmlformats.org/drawingml/2006/main">
-              <a:bodyPr xmlns:a="http://schemas.openxmlformats.org/drawingml/2006/main" wrap="none" anchor="ctr" lIns="0" tIns="0" rIns="0" bIns="0">
-                <a:noAutofit/>
-              </a:bodyPr>
-              <a:lstStyle xmlns:a="http://schemas.openxmlformats.org/drawingml/2006/main"/>
-              <a:p>
-                <a:pPr algn="ctr">
-                  <a:defRPr sz="1725">
-                    <a:solidFill>
-                      <a:srgbClr val="111111"/>
-                    </a:solidFill>
-                    <a:latin typeface="SimSun"/>
-                    <a:ea typeface="SimSun"/>
-                    <a:cs typeface="SimSun"/>
-                  </a:defRPr>
-                </a:pPr>
-                <a:r>
-                  <a:rPr sz="1725">
-                    <a:solidFill>
-                      <a:srgbClr val="111111"/>
-                    </a:solidFill>
-                    <a:latin typeface="SimSun"/>
-                  </a:rPr>
-                  <a:t>负荷扣除光伏</a:t>
-                </a:r>
-              </a:p>
-              <a:p>
-                <a:pPr algn="ctr">
-                  <a:defRPr sz="1725">
-                    <a:solidFill>
-                      <a:srgbClr val="111111"/>
-                    </a:solidFill>
-                    <a:latin typeface="SimSun"/>
-                    <a:ea typeface="SimSun"/>
-                    <a:cs typeface="SimSun"/>
-                  </a:defRPr>
-                </a:pPr>
-                <a:r>
-                  <a:rPr sz="1725">
-                    <a:solidFill>
-                      <a:srgbClr val="111111"/>
-                    </a:solidFill>
-                    <a:latin typeface="SimSun"/>
-                  </a:rPr>
-                  <a:t>按时段换算电量</a:t>
-                </a:r>
-              </a:p>
-            </p:txBody>
-          </p:sp>
-        </mc:Fallback>
-      </mc:AlternateContent>
+      <p:sp>
+        <p:nvSpPr>
+          <p:cNvPr id="11" name="eq-netload">
+            <a:extLst xmlns:a="http://schemas.openxmlformats.org/drawingml/2006/main">
+              <a:ext uri="{FF2B5EF4-FFF2-40B4-BE49-F238E27FC236}">
+                <a16:creationId xmlns:a16="http://schemas.microsoft.com/office/drawing/2014/main" id="{65C94E5D-94F6-4A19-B5CD-8D03277C4B22}"/>
+              </a:ext>
+            </a:extLst>
+          </p:cNvPr>
+          <p:cNvSpPr>
+            <a:spLocks xmlns:a="http://schemas.openxmlformats.org/drawingml/2006/main" noGrp="1"/>
+          </p:cNvSpPr>
+          <p:nvPr/>
+        </p:nvSpPr>
+        <p:spPr>
+          <a:xfrm xmlns:a="http://schemas.openxmlformats.org/drawingml/2006/main">
+            <a:off x="428625" y="4391025"/>
+            <a:ext cx="2095500" cy="533400"/>
+          </a:xfrm>
+          <a:prstGeom xmlns:a="http://schemas.openxmlformats.org/drawingml/2006/main" prst="rect">
+            <a:avLst/>
+          </a:prstGeom>
+          <a:noFill xmlns:a="http://schemas.openxmlformats.org/drawingml/2006/main"/>
+          <a:ln xmlns:a="http://schemas.openxmlformats.org/drawingml/2006/main" w="0">
+            <a:noFill/>
+          </a:ln>
+        </p:spPr>
+        <p:txBody>
+          <a:bodyPr xmlns:a="http://schemas.openxmlformats.org/drawingml/2006/main" wrap="none" lIns="0" tIns="0" rIns="0" bIns="0" anchor="ctr">
+            <a:noAutofit/>
+          </a:bodyPr>
+          <a:lstStyle xmlns:a="http://schemas.openxmlformats.org/drawingml/2006/main"/>
+          <a:p xmlns:a="http://schemas.openxmlformats.org/drawingml/2006/main">
+            <a:pPr algn="ctr">
+              <a:buNone/>
+              <a:defRPr sz="1725">
+                <a:solidFill>
+                  <a:srgbClr val="111111"/>
+                </a:solidFill>
+                <a:latin typeface="SimSun"/>
+                <a:ea typeface="SimSun"/>
+                <a:cs typeface="SimSun"/>
+              </a:defRPr>
+            </a:pPr>
+            <a:r>
+              <a:rPr sz="1725">
+                <a:solidFill>
+                  <a:srgbClr val="111111"/>
+                </a:solidFill>
+                <a:latin typeface="SimSun"/>
+                <a:ea typeface="SimSun"/>
+                <a:cs typeface="SimSun"/>
+              </a:rPr>
+              <a:t>负荷扣除光伏</a:t>
+            </a:r>
+          </a:p>
+          <a:p xmlns:a="http://schemas.openxmlformats.org/drawingml/2006/main">
+            <a:pPr algn="ctr">
+              <a:buNone/>
+              <a:defRPr sz="1725">
+                <a:solidFill>
+                  <a:srgbClr val="111111"/>
+                </a:solidFill>
+                <a:latin typeface="SimSun"/>
+                <a:ea typeface="SimSun"/>
+                <a:cs typeface="SimSun"/>
+              </a:defRPr>
+            </a:pPr>
+            <a:r>
+              <a:rPr sz="1725">
+                <a:solidFill>
+                  <a:srgbClr val="111111"/>
+                </a:solidFill>
+                <a:latin typeface="SimSun"/>
+                <a:ea typeface="SimSun"/>
+                <a:cs typeface="SimSun"/>
+              </a:rPr>
+              <a:t>按时段换算电量</a:t>
+            </a:r>
+          </a:p>
+        </p:txBody>
+      </p:sp>
       <p:sp>
         <p:nvSpPr>
           <p:cNvPr id="12" name="grid">
@@ -1927,6 +1731,7 @@
           <a:lstStyle xmlns:a="http://schemas.openxmlformats.org/drawingml/2006/main"/>
           <a:p xmlns:a="http://schemas.openxmlformats.org/drawingml/2006/main">
             <a:pPr algn="ctr">
+              <a:buNone/>
               <a:defRPr sz="1725" b="0">
                 <a:solidFill>
                   <a:srgbClr val="111111"/>
@@ -1950,6 +1755,7 @@
           </a:p>
           <a:p xmlns:a="http://schemas.openxmlformats.org/drawingml/2006/main">
             <a:pPr algn="ctr">
+              <a:buNone/>
               <a:defRPr sz="1725" b="0">
                 <a:solidFill>
                   <a:srgbClr val="111111"/>
@@ -2050,6 +1856,7 @@
           <a:lstStyle xmlns:a="http://schemas.openxmlformats.org/drawingml/2006/main"/>
           <a:p xmlns:a="http://schemas.openxmlformats.org/drawingml/2006/main">
             <a:pPr algn="ctr">
+              <a:buNone/>
               <a:defRPr sz="1575" b="1">
                 <a:solidFill>
                   <a:srgbClr val="367CB3"/>
@@ -2073,124 +1880,64 @@
           </a:p>
         </p:txBody>
       </p:sp>
-      <mc:AlternateContent xmlns:mc="http://schemas.openxmlformats.org/markup-compatibility/2006">
-        <mc:Choice xmlns:a14="http://schemas.microsoft.com/office/drawing/2010/main" Requires="a14">
-          <p:sp>
-            <p:nvSpPr>
-              <p:cNvPr id="15" name="eq-objective">
-                <a:extLst xmlns:a="http://schemas.openxmlformats.org/drawingml/2006/main">
-                  <a:ext uri="{FF2B5EF4-FFF2-40B4-BE49-F238E27FC236}">
-                    <a16:creationId xmlns:a16="http://schemas.microsoft.com/office/drawing/2014/main" id="{8AA1784B-F0B7-4E96-BBB1-C91ADBF01F31}"/>
-                  </a:ext>
-                </a:extLst>
-              </p:cNvPr>
-              <p:cNvSpPr>
-                <a:spLocks xmlns:a="http://schemas.openxmlformats.org/drawingml/2006/main" noGrp="1"/>
-              </p:cNvSpPr>
-              <p:nvPr/>
-            </p:nvSpPr>
-            <p:spPr>
-              <a:xfrm xmlns:a="http://schemas.openxmlformats.org/drawingml/2006/main">
-                <a:off x="3333750" y="1333500"/>
-                <a:ext cx="5048250" cy="571500"/>
-              </a:xfrm>
-              <a:prstGeom xmlns:a="http://schemas.openxmlformats.org/drawingml/2006/main" prst="rect">
-                <a:avLst/>
-              </a:prstGeom>
-              <a:noFill xmlns:a="http://schemas.openxmlformats.org/drawingml/2006/main"/>
-              <a:ln xmlns:a="http://schemas.openxmlformats.org/drawingml/2006/main" w="0">
-                <a:noFill/>
-              </a:ln>
-            </p:spPr>
-            <p:txBody xmlns:a="http://schemas.openxmlformats.org/drawingml/2006/main">
-              <a:bodyPr xmlns:a="http://schemas.openxmlformats.org/drawingml/2006/main" wrap="none" anchor="ctr" lIns="0" tIns="0" rIns="0" bIns="0">
-                <a:noAutofit/>
-              </a:bodyPr>
-              <a:lstStyle xmlns:a="http://schemas.openxmlformats.org/drawingml/2006/main"/>
-              <a:p>
-                <a:pPr algn="ctr">
-                  <a:defRPr sz="2175">
-                    <a:solidFill>
-                      <a:srgbClr val="111111"/>
-                    </a:solidFill>
-                    <a:latin typeface="SimSun"/>
-                    <a:ea typeface="SimSun"/>
-                    <a:cs typeface="SimSun"/>
-                  </a:defRPr>
-                </a:pPr>
-                <a:r>
-                  <a:rPr sz="2175">
-                    <a:solidFill>
-                      <a:srgbClr val="111111"/>
-                    </a:solidFill>
-                    <a:latin typeface="SimSun"/>
-                    <a:ea typeface="SimSun"/>
-                    <a:cs typeface="SimSun"/>
-                  </a:rPr>
-                  <a:t>联合确定各时段购电与储能安排</a:t>
-                </a:r>
-              </a:p>
-            </p:txBody>
-          </p:sp>
-        </mc:Choice>
-        <mc:Fallback>
-          <p:sp>
-            <p:nvSpPr>
-              <p:cNvPr id="15" name="eq-objective">
-                <a:extLst xmlns:a="http://schemas.openxmlformats.org/drawingml/2006/main">
-                  <a:ext uri="{FF2B5EF4-FFF2-40B4-BE49-F238E27FC236}">
-                    <a16:creationId xmlns:a16="http://schemas.microsoft.com/office/drawing/2014/main" id="{8AA1784B-F0B7-4E96-BBB1-C91ADBF01F31}"/>
-                  </a:ext>
-                </a:extLst>
-              </p:cNvPr>
-              <p:cNvSpPr>
-                <a:spLocks xmlns:a="http://schemas.openxmlformats.org/drawingml/2006/main" noGrp="1"/>
-              </p:cNvSpPr>
-              <p:nvPr/>
-            </p:nvSpPr>
-            <p:spPr>
-              <a:xfrm xmlns:a="http://schemas.openxmlformats.org/drawingml/2006/main">
-                <a:off x="3333750" y="1333500"/>
-                <a:ext cx="5048250" cy="571500"/>
-              </a:xfrm>
-              <a:prstGeom xmlns:a="http://schemas.openxmlformats.org/drawingml/2006/main" prst="rect">
-                <a:avLst/>
-              </a:prstGeom>
-              <a:noFill xmlns:a="http://schemas.openxmlformats.org/drawingml/2006/main"/>
-              <a:ln xmlns:a="http://schemas.openxmlformats.org/drawingml/2006/main" w="0">
-                <a:noFill/>
-              </a:ln>
-            </p:spPr>
-            <p:txBody xmlns:a="http://schemas.openxmlformats.org/drawingml/2006/main">
-              <a:bodyPr xmlns:a="http://schemas.openxmlformats.org/drawingml/2006/main" wrap="none" anchor="ctr" lIns="0" tIns="0" rIns="0" bIns="0">
-                <a:noAutofit/>
-              </a:bodyPr>
-              <a:lstStyle xmlns:a="http://schemas.openxmlformats.org/drawingml/2006/main"/>
-              <a:p>
-                <a:pPr algn="ctr">
-                  <a:defRPr sz="2175">
-                    <a:solidFill>
-                      <a:srgbClr val="111111"/>
-                    </a:solidFill>
-                    <a:latin typeface="SimSun"/>
-                    <a:ea typeface="SimSun"/>
-                    <a:cs typeface="SimSun"/>
-                  </a:defRPr>
-                </a:pPr>
-                <a:r>
-                  <a:rPr sz="2175">
-                    <a:solidFill>
-                      <a:srgbClr val="111111"/>
-                    </a:solidFill>
-                    <a:latin typeface="SimSun"/>
-                  </a:rPr>
-                  <a:t>联合确定各时段购电与储能安排</a:t>
-                </a:r>
-              </a:p>
-            </p:txBody>
-          </p:sp>
-        </mc:Fallback>
-      </mc:AlternateContent>
+      <p:sp>
+        <p:nvSpPr>
+          <p:cNvPr id="15" name="eq-objective">
+            <a:extLst xmlns:a="http://schemas.openxmlformats.org/drawingml/2006/main">
+              <a:ext uri="{FF2B5EF4-FFF2-40B4-BE49-F238E27FC236}">
+                <a16:creationId xmlns:a16="http://schemas.microsoft.com/office/drawing/2014/main" id="{8AA1784B-F0B7-4E96-BBB1-C91ADBF01F31}"/>
+              </a:ext>
+            </a:extLst>
+          </p:cNvPr>
+          <p:cNvSpPr>
+            <a:spLocks xmlns:a="http://schemas.openxmlformats.org/drawingml/2006/main" noGrp="1"/>
+          </p:cNvSpPr>
+          <p:nvPr/>
+        </p:nvSpPr>
+        <p:spPr>
+          <a:xfrm xmlns:a="http://schemas.openxmlformats.org/drawingml/2006/main">
+            <a:off x="3333750" y="1333500"/>
+            <a:ext cx="5048250" cy="571500"/>
+          </a:xfrm>
+          <a:prstGeom xmlns:a="http://schemas.openxmlformats.org/drawingml/2006/main" prst="rect">
+            <a:avLst/>
+          </a:prstGeom>
+          <a:noFill xmlns:a="http://schemas.openxmlformats.org/drawingml/2006/main"/>
+          <a:ln xmlns:a="http://schemas.openxmlformats.org/drawingml/2006/main" w="0">
+            <a:noFill/>
+          </a:ln>
+        </p:spPr>
+        <p:txBody>
+          <a:bodyPr xmlns:a="http://schemas.openxmlformats.org/drawingml/2006/main" wrap="none" lIns="0" tIns="0" rIns="0" bIns="0" anchor="ctr">
+            <a:noAutofit/>
+          </a:bodyPr>
+          <a:lstStyle xmlns:a="http://schemas.openxmlformats.org/drawingml/2006/main"/>
+          <a:p xmlns:a="http://schemas.openxmlformats.org/drawingml/2006/main">
+            <a:pPr algn="ctr">
+              <a:buNone/>
+              <a:defRPr sz="2175">
+                <a:solidFill>
+                  <a:srgbClr val="111111"/>
+                </a:solidFill>
+                <a:latin typeface="SimSun"/>
+                <a:ea typeface="SimSun"/>
+                <a:cs typeface="SimSun"/>
+              </a:defRPr>
+            </a:pPr>
+            <a:r>
+              <a:rPr sz="2175">
+                <a:solidFill>
+                  <a:srgbClr val="111111"/>
+                </a:solidFill>
+                <a:latin typeface="SimSun"/>
+                <a:ea typeface="SimSun"/>
+                <a:cs typeface="SimSun"/>
+              </a:rPr>
+              <a:t>联合确定各时段购电与储能安排</a:t>
+            </a:r>
+          </a:p>
+        </p:txBody>
+      </p:sp>
       <p:sp>
         <p:nvSpPr>
           <p:cNvPr id="16" name="joint-constraints">
@@ -2299,6 +2046,7 @@
           <a:lstStyle xmlns:a="http://schemas.openxmlformats.org/drawingml/2006/main"/>
           <a:p xmlns:a="http://schemas.openxmlformats.org/drawingml/2006/main">
             <a:pPr algn="ctr">
+              <a:buNone/>
               <a:defRPr sz="1575" b="1">
                 <a:solidFill>
                   <a:srgbClr val="367CB3"/>
@@ -2322,124 +2070,64 @@
           </a:p>
         </p:txBody>
       </p:sp>
-      <mc:AlternateContent xmlns:mc="http://schemas.openxmlformats.org/markup-compatibility/2006">
-        <mc:Choice xmlns:a14="http://schemas.microsoft.com/office/drawing/2010/main" Requires="a14">
-          <p:sp>
-            <p:nvSpPr>
-              <p:cNvPr id="19" name="eq-balance">
-                <a:extLst xmlns:a="http://schemas.openxmlformats.org/drawingml/2006/main">
-                  <a:ext uri="{FF2B5EF4-FFF2-40B4-BE49-F238E27FC236}">
-                    <a16:creationId xmlns:a16="http://schemas.microsoft.com/office/drawing/2014/main" id="{90F5D526-F455-474E-8FEB-DEEF80B75001}"/>
-                  </a:ext>
-                </a:extLst>
-              </p:cNvPr>
-              <p:cNvSpPr>
-                <a:spLocks xmlns:a="http://schemas.openxmlformats.org/drawingml/2006/main" noGrp="1"/>
-              </p:cNvSpPr>
-              <p:nvPr/>
-            </p:nvSpPr>
-            <p:spPr>
-              <a:xfrm xmlns:a="http://schemas.openxmlformats.org/drawingml/2006/main">
-                <a:off x="3409950" y="2600325"/>
-                <a:ext cx="4895850" cy="352425"/>
-              </a:xfrm>
-              <a:prstGeom xmlns:a="http://schemas.openxmlformats.org/drawingml/2006/main" prst="rect">
-                <a:avLst/>
-              </a:prstGeom>
-              <a:noFill xmlns:a="http://schemas.openxmlformats.org/drawingml/2006/main"/>
-              <a:ln xmlns:a="http://schemas.openxmlformats.org/drawingml/2006/main" w="0">
-                <a:noFill/>
-              </a:ln>
-            </p:spPr>
-            <p:txBody xmlns:a="http://schemas.openxmlformats.org/drawingml/2006/main">
-              <a:bodyPr xmlns:a="http://schemas.openxmlformats.org/drawingml/2006/main" wrap="none" anchor="ctr" lIns="0" tIns="0" rIns="0" bIns="0">
-                <a:noAutofit/>
-              </a:bodyPr>
-              <a:lstStyle xmlns:a="http://schemas.openxmlformats.org/drawingml/2006/main"/>
-              <a:p>
-                <a:pPr algn="ctr">
-                  <a:defRPr sz="1875">
-                    <a:solidFill>
-                      <a:srgbClr val="111111"/>
-                    </a:solidFill>
-                    <a:latin typeface="SimSun"/>
-                    <a:ea typeface="SimSun"/>
-                    <a:cs typeface="SimSun"/>
-                  </a:defRPr>
-                </a:pPr>
-                <a:r>
-                  <a:rPr sz="1875">
-                    <a:solidFill>
-                      <a:srgbClr val="111111"/>
-                    </a:solidFill>
-                    <a:latin typeface="SimSun"/>
-                    <a:ea typeface="SimSun"/>
-                    <a:cs typeface="SimSun"/>
-                  </a:rPr>
-                  <a:t>电力供给满足负荷、充电与弃光</a:t>
-                </a:r>
-              </a:p>
-            </p:txBody>
-          </p:sp>
-        </mc:Choice>
-        <mc:Fallback>
-          <p:sp>
-            <p:nvSpPr>
-              <p:cNvPr id="19" name="eq-balance">
-                <a:extLst xmlns:a="http://schemas.openxmlformats.org/drawingml/2006/main">
-                  <a:ext uri="{FF2B5EF4-FFF2-40B4-BE49-F238E27FC236}">
-                    <a16:creationId xmlns:a16="http://schemas.microsoft.com/office/drawing/2014/main" id="{90F5D526-F455-474E-8FEB-DEEF80B75001}"/>
-                  </a:ext>
-                </a:extLst>
-              </p:cNvPr>
-              <p:cNvSpPr>
-                <a:spLocks xmlns:a="http://schemas.openxmlformats.org/drawingml/2006/main" noGrp="1"/>
-              </p:cNvSpPr>
-              <p:nvPr/>
-            </p:nvSpPr>
-            <p:spPr>
-              <a:xfrm xmlns:a="http://schemas.openxmlformats.org/drawingml/2006/main">
-                <a:off x="3409950" y="2600325"/>
-                <a:ext cx="4895850" cy="352425"/>
-              </a:xfrm>
-              <a:prstGeom xmlns:a="http://schemas.openxmlformats.org/drawingml/2006/main" prst="rect">
-                <a:avLst/>
-              </a:prstGeom>
-              <a:noFill xmlns:a="http://schemas.openxmlformats.org/drawingml/2006/main"/>
-              <a:ln xmlns:a="http://schemas.openxmlformats.org/drawingml/2006/main" w="0">
-                <a:noFill/>
-              </a:ln>
-            </p:spPr>
-            <p:txBody xmlns:a="http://schemas.openxmlformats.org/drawingml/2006/main">
-              <a:bodyPr xmlns:a="http://schemas.openxmlformats.org/drawingml/2006/main" wrap="none" anchor="ctr" lIns="0" tIns="0" rIns="0" bIns="0">
-                <a:noAutofit/>
-              </a:bodyPr>
-              <a:lstStyle xmlns:a="http://schemas.openxmlformats.org/drawingml/2006/main"/>
-              <a:p>
-                <a:pPr algn="ctr">
-                  <a:defRPr sz="1875">
-                    <a:solidFill>
-                      <a:srgbClr val="111111"/>
-                    </a:solidFill>
-                    <a:latin typeface="SimSun"/>
-                    <a:ea typeface="SimSun"/>
-                    <a:cs typeface="SimSun"/>
-                  </a:defRPr>
-                </a:pPr>
-                <a:r>
-                  <a:rPr sz="1875">
-                    <a:solidFill>
-                      <a:srgbClr val="111111"/>
-                    </a:solidFill>
-                    <a:latin typeface="SimSun"/>
-                  </a:rPr>
-                  <a:t>电力供给满足负荷、充电与弃光</a:t>
-                </a:r>
-              </a:p>
-            </p:txBody>
-          </p:sp>
-        </mc:Fallback>
-      </mc:AlternateContent>
+      <p:sp>
+        <p:nvSpPr>
+          <p:cNvPr id="19" name="eq-balance">
+            <a:extLst xmlns:a="http://schemas.openxmlformats.org/drawingml/2006/main">
+              <a:ext uri="{FF2B5EF4-FFF2-40B4-BE49-F238E27FC236}">
+                <a16:creationId xmlns:a16="http://schemas.microsoft.com/office/drawing/2014/main" id="{90F5D526-F455-474E-8FEB-DEEF80B75001}"/>
+              </a:ext>
+            </a:extLst>
+          </p:cNvPr>
+          <p:cNvSpPr>
+            <a:spLocks xmlns:a="http://schemas.openxmlformats.org/drawingml/2006/main" noGrp="1"/>
+          </p:cNvSpPr>
+          <p:nvPr/>
+        </p:nvSpPr>
+        <p:spPr>
+          <a:xfrm xmlns:a="http://schemas.openxmlformats.org/drawingml/2006/main">
+            <a:off x="3409950" y="2600325"/>
+            <a:ext cx="4895850" cy="352425"/>
+          </a:xfrm>
+          <a:prstGeom xmlns:a="http://schemas.openxmlformats.org/drawingml/2006/main" prst="rect">
+            <a:avLst/>
+          </a:prstGeom>
+          <a:noFill xmlns:a="http://schemas.openxmlformats.org/drawingml/2006/main"/>
+          <a:ln xmlns:a="http://schemas.openxmlformats.org/drawingml/2006/main" w="0">
+            <a:noFill/>
+          </a:ln>
+        </p:spPr>
+        <p:txBody>
+          <a:bodyPr xmlns:a="http://schemas.openxmlformats.org/drawingml/2006/main" wrap="none" lIns="0" tIns="0" rIns="0" bIns="0" anchor="ctr">
+            <a:noAutofit/>
+          </a:bodyPr>
+          <a:lstStyle xmlns:a="http://schemas.openxmlformats.org/drawingml/2006/main"/>
+          <a:p xmlns:a="http://schemas.openxmlformats.org/drawingml/2006/main">
+            <a:pPr algn="ctr">
+              <a:buNone/>
+              <a:defRPr sz="1875">
+                <a:solidFill>
+                  <a:srgbClr val="111111"/>
+                </a:solidFill>
+                <a:latin typeface="SimSun"/>
+                <a:ea typeface="SimSun"/>
+                <a:cs typeface="SimSun"/>
+              </a:defRPr>
+            </a:pPr>
+            <a:r>
+              <a:rPr sz="1875">
+                <a:solidFill>
+                  <a:srgbClr val="111111"/>
+                </a:solidFill>
+                <a:latin typeface="SimSun"/>
+                <a:ea typeface="SimSun"/>
+                <a:cs typeface="SimSun"/>
+              </a:rPr>
+              <a:t>电力供给满足负荷、充电与弃光</a:t>
+            </a:r>
+          </a:p>
+        </p:txBody>
+      </p:sp>
       <p:sp>
         <p:nvSpPr>
           <p:cNvPr id="20" name="eq-soc-frame">
@@ -2517,6 +2205,7 @@
           <a:lstStyle xmlns:a="http://schemas.openxmlformats.org/drawingml/2006/main"/>
           <a:p xmlns:a="http://schemas.openxmlformats.org/drawingml/2006/main">
             <a:pPr algn="ctr">
+              <a:buNone/>
               <a:defRPr sz="1575" b="1">
                 <a:solidFill>
                   <a:srgbClr val="367CB3"/>
@@ -2540,124 +2229,64 @@
           </a:p>
         </p:txBody>
       </p:sp>
-      <mc:AlternateContent xmlns:mc="http://schemas.openxmlformats.org/markup-compatibility/2006">
-        <mc:Choice xmlns:a14="http://schemas.microsoft.com/office/drawing/2010/main" Requires="a14">
-          <p:sp>
-            <p:nvSpPr>
-              <p:cNvPr id="22" name="eq-soc">
-                <a:extLst xmlns:a="http://schemas.openxmlformats.org/drawingml/2006/main">
-                  <a:ext uri="{FF2B5EF4-FFF2-40B4-BE49-F238E27FC236}">
-                    <a16:creationId xmlns:a16="http://schemas.microsoft.com/office/drawing/2014/main" id="{282328F5-4AD0-4A76-9AA6-09189A604183}"/>
-                  </a:ext>
-                </a:extLst>
-              </p:cNvPr>
-              <p:cNvSpPr>
-                <a:spLocks xmlns:a="http://schemas.openxmlformats.org/drawingml/2006/main" noGrp="1"/>
-              </p:cNvSpPr>
-              <p:nvPr/>
-            </p:nvSpPr>
-            <p:spPr>
-              <a:xfrm xmlns:a="http://schemas.openxmlformats.org/drawingml/2006/main">
-                <a:off x="3409950" y="3438525"/>
-                <a:ext cx="4895850" cy="409575"/>
-              </a:xfrm>
-              <a:prstGeom xmlns:a="http://schemas.openxmlformats.org/drawingml/2006/main" prst="rect">
-                <a:avLst/>
-              </a:prstGeom>
-              <a:noFill xmlns:a="http://schemas.openxmlformats.org/drawingml/2006/main"/>
-              <a:ln xmlns:a="http://schemas.openxmlformats.org/drawingml/2006/main" w="0">
-                <a:noFill/>
-              </a:ln>
-            </p:spPr>
-            <p:txBody xmlns:a="http://schemas.openxmlformats.org/drawingml/2006/main">
-              <a:bodyPr xmlns:a="http://schemas.openxmlformats.org/drawingml/2006/main" wrap="none" anchor="ctr" lIns="0" tIns="0" rIns="0" bIns="0">
-                <a:noAutofit/>
-              </a:bodyPr>
-              <a:lstStyle xmlns:a="http://schemas.openxmlformats.org/drawingml/2006/main"/>
-              <a:p>
-                <a:pPr algn="ctr">
-                  <a:defRPr sz="1950">
-                    <a:solidFill>
-                      <a:srgbClr val="111111"/>
-                    </a:solidFill>
-                    <a:latin typeface="SimSun"/>
-                    <a:ea typeface="SimSun"/>
-                    <a:cs typeface="SimSun"/>
-                  </a:defRPr>
-                </a:pPr>
-                <a:r>
-                  <a:rPr sz="1950">
-                    <a:solidFill>
-                      <a:srgbClr val="111111"/>
-                    </a:solidFill>
-                    <a:latin typeface="SimSun"/>
-                    <a:ea typeface="SimSun"/>
-                    <a:cs typeface="SimSun"/>
-                  </a:rPr>
-                  <a:t>按充放电效率逐段更新储电量</a:t>
-                </a:r>
-              </a:p>
-            </p:txBody>
-          </p:sp>
-        </mc:Choice>
-        <mc:Fallback>
-          <p:sp>
-            <p:nvSpPr>
-              <p:cNvPr id="22" name="eq-soc">
-                <a:extLst xmlns:a="http://schemas.openxmlformats.org/drawingml/2006/main">
-                  <a:ext uri="{FF2B5EF4-FFF2-40B4-BE49-F238E27FC236}">
-                    <a16:creationId xmlns:a16="http://schemas.microsoft.com/office/drawing/2014/main" id="{282328F5-4AD0-4A76-9AA6-09189A604183}"/>
-                  </a:ext>
-                </a:extLst>
-              </p:cNvPr>
-              <p:cNvSpPr>
-                <a:spLocks xmlns:a="http://schemas.openxmlformats.org/drawingml/2006/main" noGrp="1"/>
-              </p:cNvSpPr>
-              <p:nvPr/>
-            </p:nvSpPr>
-            <p:spPr>
-              <a:xfrm xmlns:a="http://schemas.openxmlformats.org/drawingml/2006/main">
-                <a:off x="3409950" y="3438525"/>
-                <a:ext cx="4895850" cy="409575"/>
-              </a:xfrm>
-              <a:prstGeom xmlns:a="http://schemas.openxmlformats.org/drawingml/2006/main" prst="rect">
-                <a:avLst/>
-              </a:prstGeom>
-              <a:noFill xmlns:a="http://schemas.openxmlformats.org/drawingml/2006/main"/>
-              <a:ln xmlns:a="http://schemas.openxmlformats.org/drawingml/2006/main" w="0">
-                <a:noFill/>
-              </a:ln>
-            </p:spPr>
-            <p:txBody xmlns:a="http://schemas.openxmlformats.org/drawingml/2006/main">
-              <a:bodyPr xmlns:a="http://schemas.openxmlformats.org/drawingml/2006/main" wrap="none" anchor="ctr" lIns="0" tIns="0" rIns="0" bIns="0">
-                <a:noAutofit/>
-              </a:bodyPr>
-              <a:lstStyle xmlns:a="http://schemas.openxmlformats.org/drawingml/2006/main"/>
-              <a:p>
-                <a:pPr algn="ctr">
-                  <a:defRPr sz="1950">
-                    <a:solidFill>
-                      <a:srgbClr val="111111"/>
-                    </a:solidFill>
-                    <a:latin typeface="SimSun"/>
-                    <a:ea typeface="SimSun"/>
-                    <a:cs typeface="SimSun"/>
-                  </a:defRPr>
-                </a:pPr>
-                <a:r>
-                  <a:rPr sz="1950">
-                    <a:solidFill>
-                      <a:srgbClr val="111111"/>
-                    </a:solidFill>
-                    <a:latin typeface="SimSun"/>
-                  </a:rPr>
-                  <a:t>按充放电效率逐段更新储电量</a:t>
-                </a:r>
-              </a:p>
-            </p:txBody>
-          </p:sp>
-        </mc:Fallback>
-      </mc:AlternateContent>
+      <p:sp>
+        <p:nvSpPr>
+          <p:cNvPr id="22" name="eq-soc">
+            <a:extLst xmlns:a="http://schemas.openxmlformats.org/drawingml/2006/main">
+              <a:ext uri="{FF2B5EF4-FFF2-40B4-BE49-F238E27FC236}">
+                <a16:creationId xmlns:a16="http://schemas.microsoft.com/office/drawing/2014/main" id="{282328F5-4AD0-4A76-9AA6-09189A604183}"/>
+              </a:ext>
+            </a:extLst>
+          </p:cNvPr>
+          <p:cNvSpPr>
+            <a:spLocks xmlns:a="http://schemas.openxmlformats.org/drawingml/2006/main" noGrp="1"/>
+          </p:cNvSpPr>
+          <p:nvPr/>
+        </p:nvSpPr>
+        <p:spPr>
+          <a:xfrm xmlns:a="http://schemas.openxmlformats.org/drawingml/2006/main">
+            <a:off x="3409950" y="3438525"/>
+            <a:ext cx="4895850" cy="409575"/>
+          </a:xfrm>
+          <a:prstGeom xmlns:a="http://schemas.openxmlformats.org/drawingml/2006/main" prst="rect">
+            <a:avLst/>
+          </a:prstGeom>
+          <a:noFill xmlns:a="http://schemas.openxmlformats.org/drawingml/2006/main"/>
+          <a:ln xmlns:a="http://schemas.openxmlformats.org/drawingml/2006/main" w="0">
+            <a:noFill/>
+          </a:ln>
+        </p:spPr>
+        <p:txBody>
+          <a:bodyPr xmlns:a="http://schemas.openxmlformats.org/drawingml/2006/main" wrap="none" lIns="0" tIns="0" rIns="0" bIns="0" anchor="ctr">
+            <a:noAutofit/>
+          </a:bodyPr>
+          <a:lstStyle xmlns:a="http://schemas.openxmlformats.org/drawingml/2006/main"/>
+          <a:p xmlns:a="http://schemas.openxmlformats.org/drawingml/2006/main">
+            <a:pPr algn="ctr">
+              <a:buNone/>
+              <a:defRPr sz="1950">
+                <a:solidFill>
+                  <a:srgbClr val="111111"/>
+                </a:solidFill>
+                <a:latin typeface="SimSun"/>
+                <a:ea typeface="SimSun"/>
+                <a:cs typeface="SimSun"/>
+              </a:defRPr>
+            </a:pPr>
+            <a:r>
+              <a:rPr sz="1950">
+                <a:solidFill>
+                  <a:srgbClr val="111111"/>
+                </a:solidFill>
+                <a:latin typeface="SimSun"/>
+                <a:ea typeface="SimSun"/>
+                <a:cs typeface="SimSun"/>
+              </a:rPr>
+              <a:t>按充放电效率逐段更新储电量</a:t>
+            </a:r>
+          </a:p>
+        </p:txBody>
+      </p:sp>
       <p:sp>
         <p:nvSpPr>
           <p:cNvPr id="23" name="eq-mutual-frame">
@@ -2735,6 +2364,7 @@
           <a:lstStyle xmlns:a="http://schemas.openxmlformats.org/drawingml/2006/main"/>
           <a:p xmlns:a="http://schemas.openxmlformats.org/drawingml/2006/main">
             <a:pPr algn="ctr">
+              <a:buNone/>
               <a:defRPr sz="1575" b="1">
                 <a:solidFill>
                   <a:srgbClr val="367CB3"/>
@@ -2758,124 +2388,64 @@
           </a:p>
         </p:txBody>
       </p:sp>
-      <mc:AlternateContent xmlns:mc="http://schemas.openxmlformats.org/markup-compatibility/2006">
-        <mc:Choice xmlns:a14="http://schemas.microsoft.com/office/drawing/2010/main" Requires="a14">
-          <p:sp>
-            <p:nvSpPr>
-              <p:cNvPr id="25" name="eq-mutual">
-                <a:extLst xmlns:a="http://schemas.openxmlformats.org/drawingml/2006/main">
-                  <a:ext uri="{FF2B5EF4-FFF2-40B4-BE49-F238E27FC236}">
-                    <a16:creationId xmlns:a16="http://schemas.microsoft.com/office/drawing/2014/main" id="{3C4C5F3A-7567-4792-90AC-260D49273EB7}"/>
-                  </a:ext>
-                </a:extLst>
-              </p:cNvPr>
-              <p:cNvSpPr>
-                <a:spLocks xmlns:a="http://schemas.openxmlformats.org/drawingml/2006/main" noGrp="1"/>
-              </p:cNvSpPr>
-              <p:nvPr/>
-            </p:nvSpPr>
-            <p:spPr>
-              <a:xfrm xmlns:a="http://schemas.openxmlformats.org/drawingml/2006/main">
-                <a:off x="3409950" y="4333875"/>
-                <a:ext cx="4895850" cy="409575"/>
-              </a:xfrm>
-              <a:prstGeom xmlns:a="http://schemas.openxmlformats.org/drawingml/2006/main" prst="rect">
-                <a:avLst/>
-              </a:prstGeom>
-              <a:noFill xmlns:a="http://schemas.openxmlformats.org/drawingml/2006/main"/>
-              <a:ln xmlns:a="http://schemas.openxmlformats.org/drawingml/2006/main" w="0">
-                <a:noFill/>
-              </a:ln>
-            </p:spPr>
-            <p:txBody xmlns:a="http://schemas.openxmlformats.org/drawingml/2006/main">
-              <a:bodyPr xmlns:a="http://schemas.openxmlformats.org/drawingml/2006/main" wrap="none" anchor="ctr" lIns="0" tIns="0" rIns="0" bIns="0">
-                <a:noAutofit/>
-              </a:bodyPr>
-              <a:lstStyle xmlns:a="http://schemas.openxmlformats.org/drawingml/2006/main"/>
-              <a:p>
-                <a:pPr algn="ctr">
-                  <a:defRPr sz="1725">
-                    <a:solidFill>
-                      <a:srgbClr val="111111"/>
-                    </a:solidFill>
-                    <a:latin typeface="SimSun"/>
-                    <a:ea typeface="SimSun"/>
-                    <a:cs typeface="SimSun"/>
-                  </a:defRPr>
-                </a:pPr>
-                <a:r>
-                  <a:rPr sz="1725">
-                    <a:solidFill>
-                      <a:srgbClr val="111111"/>
-                    </a:solidFill>
-                    <a:latin typeface="SimSun"/>
-                    <a:ea typeface="SimSun"/>
-                    <a:cs typeface="SimSun"/>
-                  </a:rPr>
-                  <a:t>充电与放电不同时发生，功率受限</a:t>
-                </a:r>
-              </a:p>
-            </p:txBody>
-          </p:sp>
-        </mc:Choice>
-        <mc:Fallback>
-          <p:sp>
-            <p:nvSpPr>
-              <p:cNvPr id="25" name="eq-mutual">
-                <a:extLst xmlns:a="http://schemas.openxmlformats.org/drawingml/2006/main">
-                  <a:ext uri="{FF2B5EF4-FFF2-40B4-BE49-F238E27FC236}">
-                    <a16:creationId xmlns:a16="http://schemas.microsoft.com/office/drawing/2014/main" id="{3C4C5F3A-7567-4792-90AC-260D49273EB7}"/>
-                  </a:ext>
-                </a:extLst>
-              </p:cNvPr>
-              <p:cNvSpPr>
-                <a:spLocks xmlns:a="http://schemas.openxmlformats.org/drawingml/2006/main" noGrp="1"/>
-              </p:cNvSpPr>
-              <p:nvPr/>
-            </p:nvSpPr>
-            <p:spPr>
-              <a:xfrm xmlns:a="http://schemas.openxmlformats.org/drawingml/2006/main">
-                <a:off x="3409950" y="4333875"/>
-                <a:ext cx="4895850" cy="409575"/>
-              </a:xfrm>
-              <a:prstGeom xmlns:a="http://schemas.openxmlformats.org/drawingml/2006/main" prst="rect">
-                <a:avLst/>
-              </a:prstGeom>
-              <a:noFill xmlns:a="http://schemas.openxmlformats.org/drawingml/2006/main"/>
-              <a:ln xmlns:a="http://schemas.openxmlformats.org/drawingml/2006/main" w="0">
-                <a:noFill/>
-              </a:ln>
-            </p:spPr>
-            <p:txBody xmlns:a="http://schemas.openxmlformats.org/drawingml/2006/main">
-              <a:bodyPr xmlns:a="http://schemas.openxmlformats.org/drawingml/2006/main" wrap="none" anchor="ctr" lIns="0" tIns="0" rIns="0" bIns="0">
-                <a:noAutofit/>
-              </a:bodyPr>
-              <a:lstStyle xmlns:a="http://schemas.openxmlformats.org/drawingml/2006/main"/>
-              <a:p>
-                <a:pPr algn="ctr">
-                  <a:defRPr sz="1725">
-                    <a:solidFill>
-                      <a:srgbClr val="111111"/>
-                    </a:solidFill>
-                    <a:latin typeface="SimSun"/>
-                    <a:ea typeface="SimSun"/>
-                    <a:cs typeface="SimSun"/>
-                  </a:defRPr>
-                </a:pPr>
-                <a:r>
-                  <a:rPr sz="1725">
-                    <a:solidFill>
-                      <a:srgbClr val="111111"/>
-                    </a:solidFill>
-                    <a:latin typeface="SimSun"/>
-                  </a:rPr>
-                  <a:t>充电与放电不同时发生，功率受限</a:t>
-                </a:r>
-              </a:p>
-            </p:txBody>
-          </p:sp>
-        </mc:Fallback>
-      </mc:AlternateContent>
+      <p:sp>
+        <p:nvSpPr>
+          <p:cNvPr id="25" name="eq-mutual">
+            <a:extLst xmlns:a="http://schemas.openxmlformats.org/drawingml/2006/main">
+              <a:ext uri="{FF2B5EF4-FFF2-40B4-BE49-F238E27FC236}">
+                <a16:creationId xmlns:a16="http://schemas.microsoft.com/office/drawing/2014/main" id="{3C4C5F3A-7567-4792-90AC-260D49273EB7}"/>
+              </a:ext>
+            </a:extLst>
+          </p:cNvPr>
+          <p:cNvSpPr>
+            <a:spLocks xmlns:a="http://schemas.openxmlformats.org/drawingml/2006/main" noGrp="1"/>
+          </p:cNvSpPr>
+          <p:nvPr/>
+        </p:nvSpPr>
+        <p:spPr>
+          <a:xfrm xmlns:a="http://schemas.openxmlformats.org/drawingml/2006/main">
+            <a:off x="3409950" y="4333875"/>
+            <a:ext cx="4895850" cy="409575"/>
+          </a:xfrm>
+          <a:prstGeom xmlns:a="http://schemas.openxmlformats.org/drawingml/2006/main" prst="rect">
+            <a:avLst/>
+          </a:prstGeom>
+          <a:noFill xmlns:a="http://schemas.openxmlformats.org/drawingml/2006/main"/>
+          <a:ln xmlns:a="http://schemas.openxmlformats.org/drawingml/2006/main" w="0">
+            <a:noFill/>
+          </a:ln>
+        </p:spPr>
+        <p:txBody>
+          <a:bodyPr xmlns:a="http://schemas.openxmlformats.org/drawingml/2006/main" wrap="none" lIns="0" tIns="0" rIns="0" bIns="0" anchor="ctr">
+            <a:noAutofit/>
+          </a:bodyPr>
+          <a:lstStyle xmlns:a="http://schemas.openxmlformats.org/drawingml/2006/main"/>
+          <a:p xmlns:a="http://schemas.openxmlformats.org/drawingml/2006/main">
+            <a:pPr algn="ctr">
+              <a:buNone/>
+              <a:defRPr sz="1725">
+                <a:solidFill>
+                  <a:srgbClr val="111111"/>
+                </a:solidFill>
+                <a:latin typeface="SimSun"/>
+                <a:ea typeface="SimSun"/>
+                <a:cs typeface="SimSun"/>
+              </a:defRPr>
+            </a:pPr>
+            <a:r>
+              <a:rPr sz="1725">
+                <a:solidFill>
+                  <a:srgbClr val="111111"/>
+                </a:solidFill>
+                <a:latin typeface="SimSun"/>
+                <a:ea typeface="SimSun"/>
+                <a:cs typeface="SimSun"/>
+              </a:rPr>
+              <a:t>充电与放电不同时发生，功率受限</a:t>
+            </a:r>
+          </a:p>
+        </p:txBody>
+      </p:sp>
       <p:sp>
         <p:nvSpPr>
           <p:cNvPr id="26" name="eq-bound-frame">
@@ -2953,6 +2523,7 @@
           <a:lstStyle xmlns:a="http://schemas.openxmlformats.org/drawingml/2006/main"/>
           <a:p xmlns:a="http://schemas.openxmlformats.org/drawingml/2006/main">
             <a:pPr algn="ctr">
+              <a:buNone/>
               <a:defRPr sz="1575" b="1">
                 <a:solidFill>
                   <a:srgbClr val="367CB3"/>
@@ -2976,246 +2547,124 @@
           </a:p>
         </p:txBody>
       </p:sp>
-      <mc:AlternateContent xmlns:mc="http://schemas.openxmlformats.org/markup-compatibility/2006">
-        <mc:Choice xmlns:a14="http://schemas.microsoft.com/office/drawing/2010/main" Requires="a14">
-          <p:sp>
-            <p:nvSpPr>
-              <p:cNvPr id="28" name="eq-bound">
-                <a:extLst xmlns:a="http://schemas.openxmlformats.org/drawingml/2006/main">
-                  <a:ext uri="{FF2B5EF4-FFF2-40B4-BE49-F238E27FC236}">
-                    <a16:creationId xmlns:a16="http://schemas.microsoft.com/office/drawing/2014/main" id="{C016036B-1922-4A3F-AB66-E8C9F25C4277}"/>
-                  </a:ext>
-                </a:extLst>
-              </p:cNvPr>
-              <p:cNvSpPr>
-                <a:spLocks xmlns:a="http://schemas.openxmlformats.org/drawingml/2006/main" noGrp="1"/>
-              </p:cNvSpPr>
-              <p:nvPr/>
-            </p:nvSpPr>
-            <p:spPr>
-              <a:xfrm xmlns:a="http://schemas.openxmlformats.org/drawingml/2006/main">
-                <a:off x="3409950" y="5229225"/>
-                <a:ext cx="4895850" cy="209550"/>
-              </a:xfrm>
-              <a:prstGeom xmlns:a="http://schemas.openxmlformats.org/drawingml/2006/main" prst="rect">
-                <a:avLst/>
-              </a:prstGeom>
-              <a:noFill xmlns:a="http://schemas.openxmlformats.org/drawingml/2006/main"/>
-              <a:ln xmlns:a="http://schemas.openxmlformats.org/drawingml/2006/main" w="0">
-                <a:noFill/>
-              </a:ln>
-            </p:spPr>
-            <p:txBody xmlns:a="http://schemas.openxmlformats.org/drawingml/2006/main">
-              <a:bodyPr xmlns:a="http://schemas.openxmlformats.org/drawingml/2006/main" wrap="none" anchor="ctr" lIns="0" tIns="0" rIns="0" bIns="0">
-                <a:noAutofit/>
-              </a:bodyPr>
-              <a:lstStyle xmlns:a="http://schemas.openxmlformats.org/drawingml/2006/main"/>
-              <a:p>
-                <a:pPr algn="ctr">
-                  <a:defRPr sz="1725">
-                    <a:solidFill>
-                      <a:srgbClr val="111111"/>
-                    </a:solidFill>
-                    <a:latin typeface="SimSun"/>
-                    <a:ea typeface="SimSun"/>
-                    <a:cs typeface="SimSun"/>
-                  </a:defRPr>
-                </a:pPr>
-                <a:r>
-                  <a:rPr sz="1725">
-                    <a:solidFill>
-                      <a:srgbClr val="111111"/>
-                    </a:solidFill>
-                    <a:latin typeface="SimSun"/>
-                    <a:ea typeface="SimSun"/>
-                    <a:cs typeface="SimSun"/>
-                  </a:rPr>
-                  <a:t>储电量始终处于允许范围</a:t>
-                </a:r>
-              </a:p>
-            </p:txBody>
-          </p:sp>
-        </mc:Choice>
-        <mc:Fallback>
-          <p:sp>
-            <p:nvSpPr>
-              <p:cNvPr id="28" name="eq-bound">
-                <a:extLst xmlns:a="http://schemas.openxmlformats.org/drawingml/2006/main">
-                  <a:ext uri="{FF2B5EF4-FFF2-40B4-BE49-F238E27FC236}">
-                    <a16:creationId xmlns:a16="http://schemas.microsoft.com/office/drawing/2014/main" id="{C016036B-1922-4A3F-AB66-E8C9F25C4277}"/>
-                  </a:ext>
-                </a:extLst>
-              </p:cNvPr>
-              <p:cNvSpPr>
-                <a:spLocks xmlns:a="http://schemas.openxmlformats.org/drawingml/2006/main" noGrp="1"/>
-              </p:cNvSpPr>
-              <p:nvPr/>
-            </p:nvSpPr>
-            <p:spPr>
-              <a:xfrm xmlns:a="http://schemas.openxmlformats.org/drawingml/2006/main">
-                <a:off x="3409950" y="5229225"/>
-                <a:ext cx="4895850" cy="209550"/>
-              </a:xfrm>
-              <a:prstGeom xmlns:a="http://schemas.openxmlformats.org/drawingml/2006/main" prst="rect">
-                <a:avLst/>
-              </a:prstGeom>
-              <a:noFill xmlns:a="http://schemas.openxmlformats.org/drawingml/2006/main"/>
-              <a:ln xmlns:a="http://schemas.openxmlformats.org/drawingml/2006/main" w="0">
-                <a:noFill/>
-              </a:ln>
-            </p:spPr>
-            <p:txBody xmlns:a="http://schemas.openxmlformats.org/drawingml/2006/main">
-              <a:bodyPr xmlns:a="http://schemas.openxmlformats.org/drawingml/2006/main" wrap="none" anchor="ctr" lIns="0" tIns="0" rIns="0" bIns="0">
-                <a:noAutofit/>
-              </a:bodyPr>
-              <a:lstStyle xmlns:a="http://schemas.openxmlformats.org/drawingml/2006/main"/>
-              <a:p>
-                <a:pPr algn="ctr">
-                  <a:defRPr sz="1725">
-                    <a:solidFill>
-                      <a:srgbClr val="111111"/>
-                    </a:solidFill>
-                    <a:latin typeface="SimSun"/>
-                    <a:ea typeface="SimSun"/>
-                    <a:cs typeface="SimSun"/>
-                  </a:defRPr>
-                </a:pPr>
-                <a:r>
-                  <a:rPr sz="1725">
-                    <a:solidFill>
-                      <a:srgbClr val="111111"/>
-                    </a:solidFill>
-                    <a:latin typeface="SimSun"/>
-                  </a:rPr>
-                  <a:t>储电量始终处于允许范围</a:t>
-                </a:r>
-              </a:p>
-            </p:txBody>
-          </p:sp>
-        </mc:Fallback>
-      </mc:AlternateContent>
-      <mc:AlternateContent xmlns:mc="http://schemas.openxmlformats.org/markup-compatibility/2006">
-        <mc:Choice xmlns:a14="http://schemas.microsoft.com/office/drawing/2010/main" Requires="a14">
-          <p:sp>
-            <p:nvSpPr>
-              <p:cNvPr id="29" name="eq-boundary">
-                <a:extLst xmlns:a="http://schemas.openxmlformats.org/drawingml/2006/main">
-                  <a:ext uri="{FF2B5EF4-FFF2-40B4-BE49-F238E27FC236}">
-                    <a16:creationId xmlns:a16="http://schemas.microsoft.com/office/drawing/2014/main" id="{4819A680-690F-4088-B03D-B71559F4C173}"/>
-                  </a:ext>
-                </a:extLst>
-              </p:cNvPr>
-              <p:cNvSpPr>
-                <a:spLocks xmlns:a="http://schemas.openxmlformats.org/drawingml/2006/main" noGrp="1"/>
-              </p:cNvSpPr>
-              <p:nvPr/>
-            </p:nvSpPr>
-            <p:spPr>
-              <a:xfrm xmlns:a="http://schemas.openxmlformats.org/drawingml/2006/main">
-                <a:off x="3238500" y="5753100"/>
-                <a:ext cx="5238750" cy="352425"/>
-              </a:xfrm>
-              <a:prstGeom xmlns:a="http://schemas.openxmlformats.org/drawingml/2006/main" prst="rect">
-                <a:avLst/>
-              </a:prstGeom>
-              <a:solidFill xmlns:a="http://schemas.openxmlformats.org/drawingml/2006/main">
-                <a:srgbClr val="FFFFFF"/>
-              </a:solidFill>
-              <a:ln xmlns:a="http://schemas.openxmlformats.org/drawingml/2006/main" w="0">
-                <a:noFill/>
-              </a:ln>
-            </p:spPr>
-            <p:txBody xmlns:a="http://schemas.openxmlformats.org/drawingml/2006/main">
-              <a:bodyPr xmlns:a="http://schemas.openxmlformats.org/drawingml/2006/main" wrap="none" anchor="ctr" lIns="0" tIns="0" rIns="0" bIns="0">
-                <a:noAutofit/>
-              </a:bodyPr>
-              <a:lstStyle xmlns:a="http://schemas.openxmlformats.org/drawingml/2006/main"/>
-              <a:p>
-                <a:pPr algn="ctr">
-                  <a:defRPr sz="1875">
-                    <a:solidFill>
-                      <a:srgbClr val="111111"/>
-                    </a:solidFill>
-                    <a:latin typeface="SimSun"/>
-                    <a:ea typeface="SimSun"/>
-                    <a:cs typeface="SimSun"/>
-                  </a:defRPr>
-                </a:pPr>
-                <a:r>
-                  <a:rPr sz="1875">
-                    <a:solidFill>
-                      <a:srgbClr val="111111"/>
-                    </a:solidFill>
-                    <a:latin typeface="SimSun"/>
-                    <a:ea typeface="SimSun"/>
-                    <a:cs typeface="SimSun"/>
-                  </a:rPr>
-                  <a:t>日初与日末库存相同，充放电状态互斥</a:t>
-                </a:r>
-              </a:p>
-            </p:txBody>
-          </p:sp>
-        </mc:Choice>
-        <mc:Fallback>
-          <p:sp>
-            <p:nvSpPr>
-              <p:cNvPr id="29" name="eq-boundary">
-                <a:extLst xmlns:a="http://schemas.openxmlformats.org/drawingml/2006/main">
-                  <a:ext uri="{FF2B5EF4-FFF2-40B4-BE49-F238E27FC236}">
-                    <a16:creationId xmlns:a16="http://schemas.microsoft.com/office/drawing/2014/main" id="{4819A680-690F-4088-B03D-B71559F4C173}"/>
-                  </a:ext>
-                </a:extLst>
-              </p:cNvPr>
-              <p:cNvSpPr>
-                <a:spLocks xmlns:a="http://schemas.openxmlformats.org/drawingml/2006/main" noGrp="1"/>
-              </p:cNvSpPr>
-              <p:nvPr/>
-            </p:nvSpPr>
-            <p:spPr>
-              <a:xfrm xmlns:a="http://schemas.openxmlformats.org/drawingml/2006/main">
-                <a:off x="3238500" y="5753100"/>
-                <a:ext cx="5238750" cy="352425"/>
-              </a:xfrm>
-              <a:prstGeom xmlns:a="http://schemas.openxmlformats.org/drawingml/2006/main" prst="rect">
-                <a:avLst/>
-              </a:prstGeom>
-              <a:solidFill xmlns:a="http://schemas.openxmlformats.org/drawingml/2006/main">
-                <a:srgbClr val="FFFFFF"/>
-              </a:solidFill>
-              <a:ln xmlns:a="http://schemas.openxmlformats.org/drawingml/2006/main" w="0">
-                <a:noFill/>
-              </a:ln>
-            </p:spPr>
-            <p:txBody xmlns:a="http://schemas.openxmlformats.org/drawingml/2006/main">
-              <a:bodyPr xmlns:a="http://schemas.openxmlformats.org/drawingml/2006/main" wrap="none" anchor="ctr" lIns="0" tIns="0" rIns="0" bIns="0">
-                <a:noAutofit/>
-              </a:bodyPr>
-              <a:lstStyle xmlns:a="http://schemas.openxmlformats.org/drawingml/2006/main"/>
-              <a:p>
-                <a:pPr algn="ctr">
-                  <a:defRPr sz="1875">
-                    <a:solidFill>
-                      <a:srgbClr val="111111"/>
-                    </a:solidFill>
-                    <a:latin typeface="SimSun"/>
-                    <a:ea typeface="SimSun"/>
-                    <a:cs typeface="SimSun"/>
-                  </a:defRPr>
-                </a:pPr>
-                <a:r>
-                  <a:rPr sz="1875">
-                    <a:solidFill>
-                      <a:srgbClr val="111111"/>
-                    </a:solidFill>
-                    <a:latin typeface="SimSun"/>
-                  </a:rPr>
-                  <a:t>日初与日末库存相同，充放电状态互斥</a:t>
-                </a:r>
-              </a:p>
-            </p:txBody>
-          </p:sp>
-        </mc:Fallback>
-      </mc:AlternateContent>
+      <p:sp>
+        <p:nvSpPr>
+          <p:cNvPr id="28" name="eq-bound">
+            <a:extLst xmlns:a="http://schemas.openxmlformats.org/drawingml/2006/main">
+              <a:ext uri="{FF2B5EF4-FFF2-40B4-BE49-F238E27FC236}">
+                <a16:creationId xmlns:a16="http://schemas.microsoft.com/office/drawing/2014/main" id="{C016036B-1922-4A3F-AB66-E8C9F25C4277}"/>
+              </a:ext>
+            </a:extLst>
+          </p:cNvPr>
+          <p:cNvSpPr>
+            <a:spLocks xmlns:a="http://schemas.openxmlformats.org/drawingml/2006/main" noGrp="1"/>
+          </p:cNvSpPr>
+          <p:nvPr/>
+        </p:nvSpPr>
+        <p:spPr>
+          <a:xfrm xmlns:a="http://schemas.openxmlformats.org/drawingml/2006/main">
+            <a:off x="3409950" y="5229225"/>
+            <a:ext cx="4895850" cy="209550"/>
+          </a:xfrm>
+          <a:prstGeom xmlns:a="http://schemas.openxmlformats.org/drawingml/2006/main" prst="rect">
+            <a:avLst/>
+          </a:prstGeom>
+          <a:noFill xmlns:a="http://schemas.openxmlformats.org/drawingml/2006/main"/>
+          <a:ln xmlns:a="http://schemas.openxmlformats.org/drawingml/2006/main" w="0">
+            <a:noFill/>
+          </a:ln>
+        </p:spPr>
+        <p:txBody>
+          <a:bodyPr xmlns:a="http://schemas.openxmlformats.org/drawingml/2006/main" wrap="none" lIns="0" tIns="0" rIns="0" bIns="0" anchor="ctr">
+            <a:noAutofit/>
+          </a:bodyPr>
+          <a:lstStyle xmlns:a="http://schemas.openxmlformats.org/drawingml/2006/main"/>
+          <a:p xmlns:a="http://schemas.openxmlformats.org/drawingml/2006/main">
+            <a:pPr algn="ctr">
+              <a:buNone/>
+              <a:defRPr sz="1725">
+                <a:solidFill>
+                  <a:srgbClr val="111111"/>
+                </a:solidFill>
+                <a:latin typeface="SimSun"/>
+                <a:ea typeface="SimSun"/>
+                <a:cs typeface="SimSun"/>
+              </a:defRPr>
+            </a:pPr>
+            <a:r>
+              <a:rPr sz="1725">
+                <a:solidFill>
+                  <a:srgbClr val="111111"/>
+                </a:solidFill>
+                <a:latin typeface="SimSun"/>
+                <a:ea typeface="SimSun"/>
+                <a:cs typeface="SimSun"/>
+              </a:rPr>
+              <a:t>储电量始终处于允许范围</a:t>
+            </a:r>
+          </a:p>
+        </p:txBody>
+      </p:sp>
+      <p:sp>
+        <p:nvSpPr>
+          <p:cNvPr id="29" name="eq-boundary">
+            <a:extLst xmlns:a="http://schemas.openxmlformats.org/drawingml/2006/main">
+              <a:ext uri="{FF2B5EF4-FFF2-40B4-BE49-F238E27FC236}">
+                <a16:creationId xmlns:a16="http://schemas.microsoft.com/office/drawing/2014/main" id="{4819A680-690F-4088-B03D-B71559F4C173}"/>
+              </a:ext>
+            </a:extLst>
+          </p:cNvPr>
+          <p:cNvSpPr>
+            <a:spLocks xmlns:a="http://schemas.openxmlformats.org/drawingml/2006/main" noGrp="1"/>
+          </p:cNvSpPr>
+          <p:nvPr/>
+        </p:nvSpPr>
+        <p:spPr>
+          <a:xfrm xmlns:a="http://schemas.openxmlformats.org/drawingml/2006/main">
+            <a:off x="3238500" y="5753100"/>
+            <a:ext cx="5238750" cy="352425"/>
+          </a:xfrm>
+          <a:prstGeom xmlns:a="http://schemas.openxmlformats.org/drawingml/2006/main" prst="rect">
+            <a:avLst/>
+          </a:prstGeom>
+          <a:solidFill xmlns:a="http://schemas.openxmlformats.org/drawingml/2006/main">
+            <a:srgbClr val="FFFFFF"/>
+          </a:solidFill>
+          <a:ln xmlns:a="http://schemas.openxmlformats.org/drawingml/2006/main" w="0">
+            <a:noFill/>
+          </a:ln>
+        </p:spPr>
+        <p:txBody>
+          <a:bodyPr xmlns:a="http://schemas.openxmlformats.org/drawingml/2006/main" wrap="none" lIns="0" tIns="0" rIns="0" bIns="0" anchor="ctr">
+            <a:noAutofit/>
+          </a:bodyPr>
+          <a:lstStyle xmlns:a="http://schemas.openxmlformats.org/drawingml/2006/main"/>
+          <a:p xmlns:a="http://schemas.openxmlformats.org/drawingml/2006/main">
+            <a:pPr algn="ctr">
+              <a:buNone/>
+              <a:defRPr sz="1875">
+                <a:solidFill>
+                  <a:srgbClr val="111111"/>
+                </a:solidFill>
+                <a:latin typeface="SimSun"/>
+                <a:ea typeface="SimSun"/>
+                <a:cs typeface="SimSun"/>
+              </a:defRPr>
+            </a:pPr>
+            <a:r>
+              <a:rPr sz="1875">
+                <a:solidFill>
+                  <a:srgbClr val="111111"/>
+                </a:solidFill>
+                <a:latin typeface="SimSun"/>
+                <a:ea typeface="SimSun"/>
+                <a:cs typeface="SimSun"/>
+              </a:rPr>
+              <a:t>日初与日末库存相同，充放电状态互斥</a:t>
+            </a:r>
+          </a:p>
+        </p:txBody>
+      </p:sp>
       <p:sp>
         <p:nvSpPr>
           <p:cNvPr id="30" name="boundary-note">
@@ -3250,6 +2699,7 @@
           <a:lstStyle xmlns:a="http://schemas.openxmlformats.org/drawingml/2006/main"/>
           <a:p xmlns:a="http://schemas.openxmlformats.org/drawingml/2006/main">
             <a:pPr algn="ctr">
+              <a:buNone/>
               <a:defRPr sz="1350" b="0">
                 <a:solidFill>
                   <a:srgbClr val="444444"/>
@@ -3307,6 +2757,7 @@
           <a:lstStyle xmlns:a="http://schemas.openxmlformats.org/drawingml/2006/main"/>
           <a:p xmlns:a="http://schemas.openxmlformats.org/drawingml/2006/main">
             <a:pPr algn="ctr">
+              <a:buNone/>
               <a:defRPr sz="1950" b="1">
                 <a:solidFill>
                   <a:srgbClr val="367CB3"/>
@@ -3368,6 +2819,7 @@
           <a:lstStyle xmlns:a="http://schemas.openxmlformats.org/drawingml/2006/main"/>
           <a:p xmlns:a="http://schemas.openxmlformats.org/drawingml/2006/main">
             <a:pPr algn="ctr">
+              <a:buNone/>
               <a:defRPr sz="1800" b="0">
                 <a:solidFill>
                   <a:srgbClr val="111111"/>
@@ -3391,6 +2843,7 @@
           </a:p>
           <a:p xmlns:a="http://schemas.openxmlformats.org/drawingml/2006/main">
             <a:pPr algn="ctr">
+              <a:buNone/>
               <a:defRPr sz="1800" b="0">
                 <a:solidFill>
                   <a:srgbClr val="111111"/>
@@ -3452,6 +2905,7 @@
           <a:lstStyle xmlns:a="http://schemas.openxmlformats.org/drawingml/2006/main"/>
           <a:p xmlns:a="http://schemas.openxmlformats.org/drawingml/2006/main">
             <a:pPr algn="ctr">
+              <a:buNone/>
               <a:defRPr sz="1725" b="0">
                 <a:solidFill>
                   <a:srgbClr val="111111"/>
@@ -3475,6 +2929,7 @@
           </a:p>
           <a:p xmlns:a="http://schemas.openxmlformats.org/drawingml/2006/main">
             <a:pPr algn="ctr">
+              <a:buNone/>
               <a:defRPr sz="1725" b="0">
                 <a:solidFill>
                   <a:srgbClr val="111111"/>
@@ -3532,6 +2987,7 @@
           <a:lstStyle xmlns:a="http://schemas.openxmlformats.org/drawingml/2006/main"/>
           <a:p xmlns:a="http://schemas.openxmlformats.org/drawingml/2006/main">
             <a:pPr algn="ctr">
+              <a:buNone/>
               <a:defRPr sz="1875" b="1">
                 <a:solidFill>
                   <a:srgbClr val="367CB3"/>
@@ -3593,6 +3049,7 @@
           <a:lstStyle xmlns:a="http://schemas.openxmlformats.org/drawingml/2006/main"/>
           <a:p xmlns:a="http://schemas.openxmlformats.org/drawingml/2006/main">
             <a:pPr algn="ctr">
+              <a:buNone/>
               <a:defRPr sz="1650" b="0">
                 <a:solidFill>
                   <a:srgbClr val="111111"/>
@@ -3616,6 +3073,7 @@
           </a:p>
           <a:p xmlns:a="http://schemas.openxmlformats.org/drawingml/2006/main">
             <a:pPr algn="ctr">
+              <a:buNone/>
               <a:defRPr sz="1650" b="0">
                 <a:solidFill>
                   <a:srgbClr val="111111"/>
@@ -3639,6 +3097,7 @@
           </a:p>
           <a:p xmlns:a="http://schemas.openxmlformats.org/drawingml/2006/main">
             <a:pPr algn="ctr">
+              <a:buNone/>
               <a:defRPr sz="1650" b="0">
                 <a:solidFill>
                   <a:srgbClr val="111111"/>
@@ -3662,6 +3121,7 @@
           </a:p>
           <a:p xmlns:a="http://schemas.openxmlformats.org/drawingml/2006/main">
             <a:pPr algn="ctr">
+              <a:buNone/>
               <a:defRPr sz="1650" b="0">
                 <a:solidFill>
                   <a:srgbClr val="111111"/>
@@ -3725,6 +3185,7 @@
           <a:lstStyle xmlns:a="http://schemas.openxmlformats.org/drawingml/2006/main"/>
           <a:p xmlns:a="http://schemas.openxmlformats.org/drawingml/2006/main">
             <a:pPr algn="ctr">
+              <a:buNone/>
               <a:defRPr sz="1650" b="1">
                 <a:solidFill>
                   <a:srgbClr val="111111"/>
@@ -3748,6 +3209,7 @@
           </a:p>
           <a:p xmlns:a="http://schemas.openxmlformats.org/drawingml/2006/main">
             <a:pPr algn="ctr">
+              <a:buNone/>
               <a:defRPr sz="1650" b="1">
                 <a:solidFill>
                   <a:srgbClr val="111111"/>
@@ -3771,6 +3233,7 @@
           </a:p>
           <a:p xmlns:a="http://schemas.openxmlformats.org/drawingml/2006/main">
             <a:pPr algn="ctr">
+              <a:buNone/>
               <a:defRPr sz="1650" b="1">
                 <a:solidFill>
                   <a:srgbClr val="111111"/>
@@ -3859,6 +3322,7 @@
           <a:lstStyle xmlns:a="http://schemas.openxmlformats.org/drawingml/2006/main"/>
           <a:p xmlns:a="http://schemas.openxmlformats.org/drawingml/2006/main">
             <a:pPr algn="ctr">
+              <a:buNone/>
               <a:defRPr sz="1875" b="1">
                 <a:solidFill>
                   <a:srgbClr val="367CB3"/>
@@ -3959,6 +3423,7 @@
           <a:lstStyle xmlns:a="http://schemas.openxmlformats.org/drawingml/2006/main"/>
           <a:p xmlns:a="http://schemas.openxmlformats.org/drawingml/2006/main">
             <a:pPr algn="ctr">
+              <a:buNone/>
               <a:defRPr sz="1575" b="1">
                 <a:solidFill>
                   <a:srgbClr val="367CB3"/>
@@ -3982,124 +3447,64 @@
           </a:p>
         </p:txBody>
       </p:sp>
-      <mc:AlternateContent xmlns:mc="http://schemas.openxmlformats.org/markup-compatibility/2006">
-        <mc:Choice xmlns:a14="http://schemas.microsoft.com/office/drawing/2010/main" Requires="a14">
-          <p:sp>
-            <p:nvSpPr>
-              <p:cNvPr id="41" name="eq-baseline">
-                <a:extLst xmlns:a="http://schemas.openxmlformats.org/drawingml/2006/main">
-                  <a:ext uri="{FF2B5EF4-FFF2-40B4-BE49-F238E27FC236}">
-                    <a16:creationId xmlns:a16="http://schemas.microsoft.com/office/drawing/2014/main" id="{901C62B4-C359-4244-AABB-0AC50D5EDB4D}"/>
-                  </a:ext>
-                </a:extLst>
-              </p:cNvPr>
-              <p:cNvSpPr>
-                <a:spLocks xmlns:a="http://schemas.openxmlformats.org/drawingml/2006/main" noGrp="1"/>
-              </p:cNvSpPr>
-              <p:nvPr/>
-            </p:nvSpPr>
-            <p:spPr>
-              <a:xfrm xmlns:a="http://schemas.openxmlformats.org/drawingml/2006/main">
-                <a:off x="9248775" y="5419725"/>
-                <a:ext cx="2457450" cy="504825"/>
-              </a:xfrm>
-              <a:prstGeom xmlns:a="http://schemas.openxmlformats.org/drawingml/2006/main" prst="rect">
-                <a:avLst/>
-              </a:prstGeom>
-              <a:noFill xmlns:a="http://schemas.openxmlformats.org/drawingml/2006/main"/>
-              <a:ln xmlns:a="http://schemas.openxmlformats.org/drawingml/2006/main" w="0">
-                <a:noFill/>
-              </a:ln>
-            </p:spPr>
-            <p:txBody xmlns:a="http://schemas.openxmlformats.org/drawingml/2006/main">
-              <a:bodyPr xmlns:a="http://schemas.openxmlformats.org/drawingml/2006/main" wrap="none" anchor="ctr" lIns="0" tIns="0" rIns="0" bIns="0">
-                <a:noAutofit/>
-              </a:bodyPr>
-              <a:lstStyle xmlns:a="http://schemas.openxmlformats.org/drawingml/2006/main"/>
-              <a:p>
-                <a:pPr algn="ctr">
-                  <a:defRPr sz="1800">
-                    <a:solidFill>
-                      <a:srgbClr val="111111"/>
-                    </a:solidFill>
-                    <a:latin typeface="SimSun"/>
-                    <a:ea typeface="SimSun"/>
-                    <a:cs typeface="SimSun"/>
-                  </a:defRPr>
-                </a:pPr>
-                <a:r>
-                  <a:rPr sz="1800">
-                    <a:solidFill>
-                      <a:srgbClr val="111111"/>
-                    </a:solidFill>
-                    <a:latin typeface="SimSun"/>
-                    <a:ea typeface="SimSun"/>
-                    <a:cs typeface="SimSun"/>
-                  </a:rPr>
-                  <a:t>净需求缺口由电网补足</a:t>
-                </a:r>
-              </a:p>
-            </p:txBody>
-          </p:sp>
-        </mc:Choice>
-        <mc:Fallback>
-          <p:sp>
-            <p:nvSpPr>
-              <p:cNvPr id="41" name="eq-baseline">
-                <a:extLst xmlns:a="http://schemas.openxmlformats.org/drawingml/2006/main">
-                  <a:ext uri="{FF2B5EF4-FFF2-40B4-BE49-F238E27FC236}">
-                    <a16:creationId xmlns:a16="http://schemas.microsoft.com/office/drawing/2014/main" id="{901C62B4-C359-4244-AABB-0AC50D5EDB4D}"/>
-                  </a:ext>
-                </a:extLst>
-              </p:cNvPr>
-              <p:cNvSpPr>
-                <a:spLocks xmlns:a="http://schemas.openxmlformats.org/drawingml/2006/main" noGrp="1"/>
-              </p:cNvSpPr>
-              <p:nvPr/>
-            </p:nvSpPr>
-            <p:spPr>
-              <a:xfrm xmlns:a="http://schemas.openxmlformats.org/drawingml/2006/main">
-                <a:off x="9248775" y="5419725"/>
-                <a:ext cx="2457450" cy="504825"/>
-              </a:xfrm>
-              <a:prstGeom xmlns:a="http://schemas.openxmlformats.org/drawingml/2006/main" prst="rect">
-                <a:avLst/>
-              </a:prstGeom>
-              <a:noFill xmlns:a="http://schemas.openxmlformats.org/drawingml/2006/main"/>
-              <a:ln xmlns:a="http://schemas.openxmlformats.org/drawingml/2006/main" w="0">
-                <a:noFill/>
-              </a:ln>
-            </p:spPr>
-            <p:txBody xmlns:a="http://schemas.openxmlformats.org/drawingml/2006/main">
-              <a:bodyPr xmlns:a="http://schemas.openxmlformats.org/drawingml/2006/main" wrap="none" anchor="ctr" lIns="0" tIns="0" rIns="0" bIns="0">
-                <a:noAutofit/>
-              </a:bodyPr>
-              <a:lstStyle xmlns:a="http://schemas.openxmlformats.org/drawingml/2006/main"/>
-              <a:p>
-                <a:pPr algn="ctr">
-                  <a:defRPr sz="1800">
-                    <a:solidFill>
-                      <a:srgbClr val="111111"/>
-                    </a:solidFill>
-                    <a:latin typeface="SimSun"/>
-                    <a:ea typeface="SimSun"/>
-                    <a:cs typeface="SimSun"/>
-                  </a:defRPr>
-                </a:pPr>
-                <a:r>
-                  <a:rPr sz="1800">
-                    <a:solidFill>
-                      <a:srgbClr val="111111"/>
-                    </a:solidFill>
-                    <a:latin typeface="SimSun"/>
-                  </a:rPr>
-                  <a:t>净需求缺口由电网补足</a:t>
-                </a:r>
-              </a:p>
-            </p:txBody>
-          </p:sp>
-        </mc:Fallback>
-      </mc:AlternateContent>
+      <p:sp>
+        <p:nvSpPr>
+          <p:cNvPr id="41" name="eq-baseline">
+            <a:extLst xmlns:a="http://schemas.openxmlformats.org/drawingml/2006/main">
+              <a:ext uri="{FF2B5EF4-FFF2-40B4-BE49-F238E27FC236}">
+                <a16:creationId xmlns:a16="http://schemas.microsoft.com/office/drawing/2014/main" id="{901C62B4-C359-4244-AABB-0AC50D5EDB4D}"/>
+              </a:ext>
+            </a:extLst>
+          </p:cNvPr>
+          <p:cNvSpPr>
+            <a:spLocks xmlns:a="http://schemas.openxmlformats.org/drawingml/2006/main" noGrp="1"/>
+          </p:cNvSpPr>
+          <p:nvPr/>
+        </p:nvSpPr>
+        <p:spPr>
+          <a:xfrm xmlns:a="http://schemas.openxmlformats.org/drawingml/2006/main">
+            <a:off x="9248775" y="5419725"/>
+            <a:ext cx="2457450" cy="504825"/>
+          </a:xfrm>
+          <a:prstGeom xmlns:a="http://schemas.openxmlformats.org/drawingml/2006/main" prst="rect">
+            <a:avLst/>
+          </a:prstGeom>
+          <a:noFill xmlns:a="http://schemas.openxmlformats.org/drawingml/2006/main"/>
+          <a:ln xmlns:a="http://schemas.openxmlformats.org/drawingml/2006/main" w="0">
+            <a:noFill/>
+          </a:ln>
+        </p:spPr>
+        <p:txBody>
+          <a:bodyPr xmlns:a="http://schemas.openxmlformats.org/drawingml/2006/main" wrap="none" lIns="0" tIns="0" rIns="0" bIns="0" anchor="ctr">
+            <a:noAutofit/>
+          </a:bodyPr>
+          <a:lstStyle xmlns:a="http://schemas.openxmlformats.org/drawingml/2006/main"/>
+          <a:p xmlns:a="http://schemas.openxmlformats.org/drawingml/2006/main">
+            <a:pPr algn="ctr">
+              <a:buNone/>
+              <a:defRPr sz="1800">
+                <a:solidFill>
+                  <a:srgbClr val="111111"/>
+                </a:solidFill>
+                <a:latin typeface="SimSun"/>
+                <a:ea typeface="SimSun"/>
+                <a:cs typeface="SimSun"/>
+              </a:defRPr>
+            </a:pPr>
+            <a:r>
+              <a:rPr sz="1800">
+                <a:solidFill>
+                  <a:srgbClr val="111111"/>
+                </a:solidFill>
+                <a:latin typeface="SimSun"/>
+                <a:ea typeface="SimSun"/>
+                <a:cs typeface="SimSun"/>
+              </a:rPr>
+              <a:t>净需求缺口由电网补足</a:t>
+            </a:r>
+          </a:p>
+        </p:txBody>
+      </p:sp>
       <p:sp>
         <p:nvSpPr>
           <p:cNvPr id="42" name="lp-relax">
@@ -4138,6 +3543,7 @@
           <a:lstStyle xmlns:a="http://schemas.openxmlformats.org/drawingml/2006/main"/>
           <a:p xmlns:a="http://schemas.openxmlformats.org/drawingml/2006/main">
             <a:pPr algn="ctr">
+              <a:buNone/>
               <a:defRPr sz="1800" b="0">
                 <a:solidFill>
                   <a:srgbClr val="111111"/>
@@ -4161,6 +3567,7 @@
           </a:p>
           <a:p xmlns:a="http://schemas.openxmlformats.org/drawingml/2006/main">
             <a:pPr algn="ctr">
+              <a:buNone/>
               <a:defRPr sz="1800" b="0">
                 <a:solidFill>
                   <a:srgbClr val="111111"/>
@@ -4218,6 +3625,7 @@
           <a:lstStyle xmlns:a="http://schemas.openxmlformats.org/drawingml/2006/main"/>
           <a:p xmlns:a="http://schemas.openxmlformats.org/drawingml/2006/main">
             <a:pPr algn="ctr">
+              <a:buNone/>
               <a:defRPr sz="1500" b="0">
                 <a:solidFill>
                   <a:srgbClr val="444444"/>
@@ -4299,7 +3707,7 @@
       </p:sp>
       <p:cxnSp>
         <p:nvCxnSpPr>
-          <p:cNvPr id="123" name=""/>
+          <p:cNvPr id="199" name=""/>
           <p:cNvCxnSpPr>
             <a:stCxn xmlns:a="http://schemas.openxmlformats.org/drawingml/2006/main" id="44" idx="2"/>
             <a:endCxn xmlns:a="http://schemas.openxmlformats.org/drawingml/2006/main" id="45" idx="0"/>
@@ -4380,7 +3788,7 @@
       </p:sp>
       <p:cxnSp>
         <p:nvCxnSpPr>
-          <p:cNvPr id="126" name=""/>
+          <p:cNvPr id="202" name=""/>
           <p:cNvCxnSpPr>
             <a:stCxn xmlns:a="http://schemas.openxmlformats.org/drawingml/2006/main" id="47" idx="2"/>
             <a:endCxn xmlns:a="http://schemas.openxmlformats.org/drawingml/2006/main" id="48" idx="0"/>
@@ -4461,7 +3869,7 @@
       </p:sp>
       <p:cxnSp>
         <p:nvCxnSpPr>
-          <p:cNvPr id="129" name=""/>
+          <p:cNvPr id="205" name=""/>
           <p:cNvCxnSpPr>
             <a:stCxn xmlns:a="http://schemas.openxmlformats.org/drawingml/2006/main" id="50" idx="2"/>
             <a:endCxn xmlns:a="http://schemas.openxmlformats.org/drawingml/2006/main" id="51" idx="0"/>
@@ -4542,7 +3950,7 @@
       </p:sp>
       <p:cxnSp>
         <p:nvCxnSpPr>
-          <p:cNvPr id="132" name=""/>
+          <p:cNvPr id="208" name=""/>
           <p:cNvCxnSpPr>
             <a:stCxn xmlns:a="http://schemas.openxmlformats.org/drawingml/2006/main" id="53" idx="3"/>
             <a:endCxn xmlns:a="http://schemas.openxmlformats.org/drawingml/2006/main" id="54" idx="1"/>
@@ -4623,7 +4031,7 @@
       </p:sp>
       <p:cxnSp>
         <p:nvCxnSpPr>
-          <p:cNvPr id="135" name=""/>
+          <p:cNvPr id="211" name=""/>
           <p:cNvCxnSpPr>
             <a:stCxn xmlns:a="http://schemas.openxmlformats.org/drawingml/2006/main" id="56" idx="3"/>
             <a:endCxn xmlns:a="http://schemas.openxmlformats.org/drawingml/2006/main" id="57" idx="1"/>
@@ -4704,7 +4112,7 @@
       </p:sp>
       <p:cxnSp>
         <p:nvCxnSpPr>
-          <p:cNvPr id="138" name=""/>
+          <p:cNvPr id="214" name=""/>
           <p:cNvCxnSpPr>
             <a:stCxn xmlns:a="http://schemas.openxmlformats.org/drawingml/2006/main" id="59" idx="2"/>
             <a:endCxn xmlns:a="http://schemas.openxmlformats.org/drawingml/2006/main" id="60" idx="0"/>
@@ -4785,7 +4193,7 @@
       </p:sp>
       <p:cxnSp>
         <p:nvCxnSpPr>
-          <p:cNvPr id="141" name=""/>
+          <p:cNvPr id="217" name=""/>
           <p:cNvCxnSpPr>
             <a:stCxn xmlns:a="http://schemas.openxmlformats.org/drawingml/2006/main" id="62" idx="3"/>
             <a:endCxn xmlns:a="http://schemas.openxmlformats.org/drawingml/2006/main" id="63" idx="1"/>
@@ -4865,7 +4273,7 @@
       </p:sp>
       <p:cxnSp>
         <p:nvCxnSpPr>
-          <p:cNvPr id="144" name=""/>
+          <p:cNvPr id="220" name=""/>
           <p:cNvCxnSpPr>
             <a:stCxn xmlns:a="http://schemas.openxmlformats.org/drawingml/2006/main" id="65" idx="2"/>
             <a:endCxn xmlns:a="http://schemas.openxmlformats.org/drawingml/2006/main" id="66" idx="0"/>
@@ -4945,7 +4353,7 @@
       </p:sp>
       <p:cxnSp>
         <p:nvCxnSpPr>
-          <p:cNvPr id="147" name=""/>
+          <p:cNvPr id="223" name=""/>
           <p:cNvCxnSpPr>
             <a:stCxn xmlns:a="http://schemas.openxmlformats.org/drawingml/2006/main" id="68" idx="3"/>
             <a:endCxn xmlns:a="http://schemas.openxmlformats.org/drawingml/2006/main" id="69" idx="1"/>
@@ -5026,7 +4434,7 @@
       </p:sp>
       <p:cxnSp>
         <p:nvCxnSpPr>
-          <p:cNvPr id="150" name=""/>
+          <p:cNvPr id="226" name=""/>
           <p:cNvCxnSpPr>
             <a:stCxn xmlns:a="http://schemas.openxmlformats.org/drawingml/2006/main" id="71" idx="2"/>
             <a:endCxn xmlns:a="http://schemas.openxmlformats.org/drawingml/2006/main" id="72" idx="0"/>
@@ -5107,7 +4515,7 @@
       </p:sp>
       <p:cxnSp>
         <p:nvCxnSpPr>
-          <p:cNvPr id="153" name=""/>
+          <p:cNvPr id="229" name=""/>
           <p:cNvCxnSpPr>
             <a:stCxn xmlns:a="http://schemas.openxmlformats.org/drawingml/2006/main" id="74" idx="2"/>
             <a:endCxn xmlns:a="http://schemas.openxmlformats.org/drawingml/2006/main" id="75" idx="0"/>
@@ -5164,6 +4572,7 @@
           <a:lstStyle xmlns:a="http://schemas.openxmlformats.org/drawingml/2006/main"/>
           <a:p xmlns:a="http://schemas.openxmlformats.org/drawingml/2006/main">
             <a:pPr algn="ctr">
+              <a:buNone/>
               <a:defRPr sz="1500" b="0">
                 <a:solidFill>
                   <a:srgbClr val="444444"/>
